--- a/Especializacion/Proyecto I/Clases/Sesion 08 - Diseño metodológico paradigma, enfoque y alcance/Presentacion.pptx
+++ b/Especializacion/Proyecto I/Clases/Sesion 08 - Diseño metodológico paradigma, enfoque y alcance/Presentacion.pptx
@@ -3365,41 +3365,6 @@
           </a:p>
         </p:txBody>
       </p:sp>
-      <p:sp>
-        <p:nvSpPr>
-          <p:cNvPr id="7" name="TextBox 6"/>
-          <p:cNvSpPr txBox="1"/>
-          <p:nvPr/>
-        </p:nvSpPr>
-        <p:spPr>
-          <a:xfrm>
-            <a:off x="2194560" y="6446520"/>
-            <a:ext cx="5943600" cy="274320"/>
-          </a:xfrm>
-          <a:prstGeom prst="rect">
-            <a:avLst/>
-          </a:prstGeom>
-          <a:noFill/>
-        </p:spPr>
-        <p:txBody>
-          <a:bodyPr wrap="square" anchor="t" lIns="0" rIns="0" tIns="0" bIns="0">
-            <a:spAutoFit/>
-          </a:bodyPr>
-          <a:lstStyle/>
-          <a:p>
-            <a:pPr algn="l"/>
-            <a:r>
-              <a:rPr sz="1000" b="1" i="0">
-                <a:solidFill>
-                  <a:srgbClr val="8F989D"/>
-                </a:solidFill>
-                <a:latin typeface="Calibri"/>
-              </a:rPr>
-              <a:t>Inicio 8:10 pm</a:t>
-            </a:r>
-          </a:p>
-        </p:txBody>
-      </p:sp>
     </p:spTree>
   </p:cSld>
   <p:clrMapOvr>
@@ -3905,41 +3870,6 @@
         </p:nvSpPr>
         <p:spPr>
           <a:xfrm>
-            <a:off x="2194560" y="6446520"/>
-            <a:ext cx="5943600" cy="274320"/>
-          </a:xfrm>
-          <a:prstGeom prst="rect">
-            <a:avLst/>
-          </a:prstGeom>
-          <a:noFill/>
-        </p:spPr>
-        <p:txBody>
-          <a:bodyPr wrap="square" anchor="t" lIns="0" rIns="0" tIns="0" bIns="0">
-            <a:spAutoFit/>
-          </a:bodyPr>
-          <a:lstStyle/>
-          <a:p>
-            <a:pPr algn="l"/>
-            <a:r>
-              <a:rPr sz="1000" b="1" i="0">
-                <a:solidFill>
-                  <a:srgbClr val="8F989D"/>
-                </a:solidFill>
-                <a:latin typeface="Calibri"/>
-              </a:rPr>
-              <a:t>Inicio 8:10 pm</a:t>
-            </a:r>
-          </a:p>
-        </p:txBody>
-      </p:sp>
-      <p:sp>
-        <p:nvSpPr>
-          <p:cNvPr id="6" name="TextBox 5"/>
-          <p:cNvSpPr txBox="1"/>
-          <p:nvPr/>
-        </p:nvSpPr>
-        <p:spPr>
-          <a:xfrm>
             <a:off x="11094415" y="6446520"/>
             <a:ext cx="548640" cy="274320"/>
           </a:xfrm>
@@ -3969,7 +3899,7 @@
       </p:sp>
       <p:sp>
         <p:nvSpPr>
-          <p:cNvPr id="7" name="TextBox 6"/>
+          <p:cNvPr id="6" name="TextBox 5"/>
           <p:cNvSpPr txBox="1"/>
           <p:nvPr/>
         </p:nvSpPr>
@@ -5023,41 +4953,6 @@
         </p:nvSpPr>
         <p:spPr>
           <a:xfrm>
-            <a:off x="2194560" y="6446520"/>
-            <a:ext cx="5943600" cy="274320"/>
-          </a:xfrm>
-          <a:prstGeom prst="rect">
-            <a:avLst/>
-          </a:prstGeom>
-          <a:noFill/>
-        </p:spPr>
-        <p:txBody>
-          <a:bodyPr wrap="square" anchor="t" lIns="0" rIns="0" tIns="0" bIns="0">
-            <a:spAutoFit/>
-          </a:bodyPr>
-          <a:lstStyle/>
-          <a:p>
-            <a:pPr algn="l"/>
-            <a:r>
-              <a:rPr sz="1000" b="1" i="0">
-                <a:solidFill>
-                  <a:srgbClr val="8F989D"/>
-                </a:solidFill>
-                <a:latin typeface="Calibri"/>
-              </a:rPr>
-              <a:t>Inicio 8:10 pm</a:t>
-            </a:r>
-          </a:p>
-        </p:txBody>
-      </p:sp>
-      <p:sp>
-        <p:nvSpPr>
-          <p:cNvPr id="7" name="TextBox 6"/>
-          <p:cNvSpPr txBox="1"/>
-          <p:nvPr/>
-        </p:nvSpPr>
-        <p:spPr>
-          <a:xfrm>
             <a:off x="11094415" y="6446520"/>
             <a:ext cx="548640" cy="274320"/>
           </a:xfrm>
@@ -5507,41 +5402,6 @@
         </p:nvSpPr>
         <p:spPr>
           <a:xfrm>
-            <a:off x="2194560" y="6446520"/>
-            <a:ext cx="5943600" cy="274320"/>
-          </a:xfrm>
-          <a:prstGeom prst="rect">
-            <a:avLst/>
-          </a:prstGeom>
-          <a:noFill/>
-        </p:spPr>
-        <p:txBody>
-          <a:bodyPr wrap="square" anchor="t" lIns="0" rIns="0" tIns="0" bIns="0">
-            <a:spAutoFit/>
-          </a:bodyPr>
-          <a:lstStyle/>
-          <a:p>
-            <a:pPr algn="l"/>
-            <a:r>
-              <a:rPr sz="1000" b="1" i="0">
-                <a:solidFill>
-                  <a:srgbClr val="8F989D"/>
-                </a:solidFill>
-                <a:latin typeface="Calibri"/>
-              </a:rPr>
-              <a:t>Inicio 8:10 pm</a:t>
-            </a:r>
-          </a:p>
-        </p:txBody>
-      </p:sp>
-      <p:sp>
-        <p:nvSpPr>
-          <p:cNvPr id="11" name="TextBox 10"/>
-          <p:cNvSpPr txBox="1"/>
-          <p:nvPr/>
-        </p:nvSpPr>
-        <p:spPr>
-          <a:xfrm>
             <a:off x="11094415" y="6446520"/>
             <a:ext cx="548640" cy="274320"/>
           </a:xfrm>
@@ -5803,41 +5663,6 @@
         </p:nvSpPr>
         <p:spPr>
           <a:xfrm>
-            <a:off x="2194560" y="6446520"/>
-            <a:ext cx="5943600" cy="274320"/>
-          </a:xfrm>
-          <a:prstGeom prst="rect">
-            <a:avLst/>
-          </a:prstGeom>
-          <a:noFill/>
-        </p:spPr>
-        <p:txBody>
-          <a:bodyPr wrap="square" anchor="t" lIns="0" rIns="0" tIns="0" bIns="0">
-            <a:spAutoFit/>
-          </a:bodyPr>
-          <a:lstStyle/>
-          <a:p>
-            <a:pPr algn="l"/>
-            <a:r>
-              <a:rPr sz="1000" b="1" i="0">
-                <a:solidFill>
-                  <a:srgbClr val="8F989D"/>
-                </a:solidFill>
-                <a:latin typeface="Calibri"/>
-              </a:rPr>
-              <a:t>Inicio 8:10 pm</a:t>
-            </a:r>
-          </a:p>
-        </p:txBody>
-      </p:sp>
-      <p:sp>
-        <p:nvSpPr>
-          <p:cNvPr id="7" name="TextBox 6"/>
-          <p:cNvSpPr txBox="1"/>
-          <p:nvPr/>
-        </p:nvSpPr>
-        <p:spPr>
-          <a:xfrm>
             <a:off x="11094415" y="6446520"/>
             <a:ext cx="548640" cy="274320"/>
           </a:xfrm>
@@ -6469,41 +6294,6 @@
         </p:nvSpPr>
         <p:spPr>
           <a:xfrm>
-            <a:off x="2194560" y="6446520"/>
-            <a:ext cx="5943600" cy="274320"/>
-          </a:xfrm>
-          <a:prstGeom prst="rect">
-            <a:avLst/>
-          </a:prstGeom>
-          <a:noFill/>
-        </p:spPr>
-        <p:txBody>
-          <a:bodyPr wrap="square" anchor="t" lIns="0" rIns="0" tIns="0" bIns="0">
-            <a:spAutoFit/>
-          </a:bodyPr>
-          <a:lstStyle/>
-          <a:p>
-            <a:pPr algn="l"/>
-            <a:r>
-              <a:rPr sz="1000" b="1" i="0">
-                <a:solidFill>
-                  <a:srgbClr val="8F989D"/>
-                </a:solidFill>
-                <a:latin typeface="Calibri"/>
-              </a:rPr>
-              <a:t>Inicio 8:10 pm</a:t>
-            </a:r>
-          </a:p>
-        </p:txBody>
-      </p:sp>
-      <p:sp>
-        <p:nvSpPr>
-          <p:cNvPr id="6" name="TextBox 5"/>
-          <p:cNvSpPr txBox="1"/>
-          <p:nvPr/>
-        </p:nvSpPr>
-        <p:spPr>
-          <a:xfrm>
             <a:off x="11094415" y="6446520"/>
             <a:ext cx="548640" cy="274320"/>
           </a:xfrm>
@@ -6991,41 +6781,6 @@
         </p:nvSpPr>
         <p:spPr>
           <a:xfrm>
-            <a:off x="2194560" y="6446520"/>
-            <a:ext cx="5943600" cy="274320"/>
-          </a:xfrm>
-          <a:prstGeom prst="rect">
-            <a:avLst/>
-          </a:prstGeom>
-          <a:noFill/>
-        </p:spPr>
-        <p:txBody>
-          <a:bodyPr wrap="square" anchor="t" lIns="0" rIns="0" tIns="0" bIns="0">
-            <a:spAutoFit/>
-          </a:bodyPr>
-          <a:lstStyle/>
-          <a:p>
-            <a:pPr algn="l"/>
-            <a:r>
-              <a:rPr sz="1000" b="1" i="0">
-                <a:solidFill>
-                  <a:srgbClr val="8F989D"/>
-                </a:solidFill>
-                <a:latin typeface="Calibri"/>
-              </a:rPr>
-              <a:t>Inicio 8:10 pm</a:t>
-            </a:r>
-          </a:p>
-        </p:txBody>
-      </p:sp>
-      <p:sp>
-        <p:nvSpPr>
-          <p:cNvPr id="6" name="TextBox 5"/>
-          <p:cNvSpPr txBox="1"/>
-          <p:nvPr/>
-        </p:nvSpPr>
-        <p:spPr>
-          <a:xfrm>
             <a:off x="11094415" y="6446520"/>
             <a:ext cx="548640" cy="274320"/>
           </a:xfrm>
@@ -7459,41 +7214,6 @@
         </p:nvSpPr>
         <p:spPr>
           <a:xfrm>
-            <a:off x="2194560" y="6446520"/>
-            <a:ext cx="5943600" cy="274320"/>
-          </a:xfrm>
-          <a:prstGeom prst="rect">
-            <a:avLst/>
-          </a:prstGeom>
-          <a:noFill/>
-        </p:spPr>
-        <p:txBody>
-          <a:bodyPr wrap="square" anchor="t" lIns="0" rIns="0" tIns="0" bIns="0">
-            <a:spAutoFit/>
-          </a:bodyPr>
-          <a:lstStyle/>
-          <a:p>
-            <a:pPr algn="l"/>
-            <a:r>
-              <a:rPr sz="1000" b="1" i="0">
-                <a:solidFill>
-                  <a:srgbClr val="8F989D"/>
-                </a:solidFill>
-                <a:latin typeface="Calibri"/>
-              </a:rPr>
-              <a:t>Inicio 8:10 pm</a:t>
-            </a:r>
-          </a:p>
-        </p:txBody>
-      </p:sp>
-      <p:sp>
-        <p:nvSpPr>
-          <p:cNvPr id="6" name="TextBox 5"/>
-          <p:cNvSpPr txBox="1"/>
-          <p:nvPr/>
-        </p:nvSpPr>
-        <p:spPr>
-          <a:xfrm>
             <a:off x="11094415" y="6446520"/>
             <a:ext cx="548640" cy="274320"/>
           </a:xfrm>
@@ -7927,41 +7647,6 @@
         </p:nvSpPr>
         <p:spPr>
           <a:xfrm>
-            <a:off x="2194560" y="6446520"/>
-            <a:ext cx="5943600" cy="274320"/>
-          </a:xfrm>
-          <a:prstGeom prst="rect">
-            <a:avLst/>
-          </a:prstGeom>
-          <a:noFill/>
-        </p:spPr>
-        <p:txBody>
-          <a:bodyPr wrap="square" anchor="t" lIns="0" rIns="0" tIns="0" bIns="0">
-            <a:spAutoFit/>
-          </a:bodyPr>
-          <a:lstStyle/>
-          <a:p>
-            <a:pPr algn="l"/>
-            <a:r>
-              <a:rPr sz="1000" b="1" i="0">
-                <a:solidFill>
-                  <a:srgbClr val="8F989D"/>
-                </a:solidFill>
-                <a:latin typeface="Calibri"/>
-              </a:rPr>
-              <a:t>Inicio 8:10 pm</a:t>
-            </a:r>
-          </a:p>
-        </p:txBody>
-      </p:sp>
-      <p:sp>
-        <p:nvSpPr>
-          <p:cNvPr id="6" name="TextBox 5"/>
-          <p:cNvSpPr txBox="1"/>
-          <p:nvPr/>
-        </p:nvSpPr>
-        <p:spPr>
-          <a:xfrm>
             <a:off x="11094415" y="6446520"/>
             <a:ext cx="548640" cy="274320"/>
           </a:xfrm>
@@ -8208,41 +7893,6 @@
           </a:p>
         </p:txBody>
       </p:sp>
-      <p:sp>
-        <p:nvSpPr>
-          <p:cNvPr id="7" name="TextBox 6"/>
-          <p:cNvSpPr txBox="1"/>
-          <p:nvPr/>
-        </p:nvSpPr>
-        <p:spPr>
-          <a:xfrm>
-            <a:off x="2194560" y="6446520"/>
-            <a:ext cx="5943600" cy="274320"/>
-          </a:xfrm>
-          <a:prstGeom prst="rect">
-            <a:avLst/>
-          </a:prstGeom>
-          <a:noFill/>
-        </p:spPr>
-        <p:txBody>
-          <a:bodyPr wrap="square" anchor="t" lIns="0" rIns="0" tIns="0" bIns="0">
-            <a:spAutoFit/>
-          </a:bodyPr>
-          <a:lstStyle/>
-          <a:p>
-            <a:pPr algn="l"/>
-            <a:r>
-              <a:rPr sz="1000" b="1" i="0">
-                <a:solidFill>
-                  <a:srgbClr val="8F989D"/>
-                </a:solidFill>
-                <a:latin typeface="Calibri"/>
-              </a:rPr>
-              <a:t>Inicio 8:10 pm</a:t>
-            </a:r>
-          </a:p>
-        </p:txBody>
-      </p:sp>
     </p:spTree>
   </p:cSld>
   <p:clrMapOvr>
@@ -8775,41 +8425,6 @@
         </p:nvSpPr>
         <p:spPr>
           <a:xfrm>
-            <a:off x="2194560" y="6446520"/>
-            <a:ext cx="5943600" cy="274320"/>
-          </a:xfrm>
-          <a:prstGeom prst="rect">
-            <a:avLst/>
-          </a:prstGeom>
-          <a:noFill/>
-        </p:spPr>
-        <p:txBody>
-          <a:bodyPr wrap="square" anchor="t" lIns="0" rIns="0" tIns="0" bIns="0">
-            <a:spAutoFit/>
-          </a:bodyPr>
-          <a:lstStyle/>
-          <a:p>
-            <a:pPr algn="l"/>
-            <a:r>
-              <a:rPr sz="1000" b="1" i="0">
-                <a:solidFill>
-                  <a:srgbClr val="8F989D"/>
-                </a:solidFill>
-                <a:latin typeface="Calibri"/>
-              </a:rPr>
-              <a:t>Inicio 8:10 pm</a:t>
-            </a:r>
-          </a:p>
-        </p:txBody>
-      </p:sp>
-      <p:sp>
-        <p:nvSpPr>
-          <p:cNvPr id="6" name="TextBox 5"/>
-          <p:cNvSpPr txBox="1"/>
-          <p:nvPr/>
-        </p:nvSpPr>
-        <p:spPr>
-          <a:xfrm>
             <a:off x="11094415" y="6446520"/>
             <a:ext cx="548640" cy="274320"/>
           </a:xfrm>
@@ -9243,41 +8858,6 @@
         </p:nvSpPr>
         <p:spPr>
           <a:xfrm>
-            <a:off x="2194560" y="6446520"/>
-            <a:ext cx="5943600" cy="274320"/>
-          </a:xfrm>
-          <a:prstGeom prst="rect">
-            <a:avLst/>
-          </a:prstGeom>
-          <a:noFill/>
-        </p:spPr>
-        <p:txBody>
-          <a:bodyPr wrap="square" anchor="t" lIns="0" rIns="0" tIns="0" bIns="0">
-            <a:spAutoFit/>
-          </a:bodyPr>
-          <a:lstStyle/>
-          <a:p>
-            <a:pPr algn="l"/>
-            <a:r>
-              <a:rPr sz="1000" b="1" i="0">
-                <a:solidFill>
-                  <a:srgbClr val="8F989D"/>
-                </a:solidFill>
-                <a:latin typeface="Calibri"/>
-              </a:rPr>
-              <a:t>Inicio 8:10 pm</a:t>
-            </a:r>
-          </a:p>
-        </p:txBody>
-      </p:sp>
-      <p:sp>
-        <p:nvSpPr>
-          <p:cNvPr id="6" name="TextBox 5"/>
-          <p:cNvSpPr txBox="1"/>
-          <p:nvPr/>
-        </p:nvSpPr>
-        <p:spPr>
-          <a:xfrm>
             <a:off x="11094415" y="6446520"/>
             <a:ext cx="548640" cy="274320"/>
           </a:xfrm>
@@ -9968,41 +9548,6 @@
         </p:nvSpPr>
         <p:spPr>
           <a:xfrm>
-            <a:off x="2194560" y="6446520"/>
-            <a:ext cx="5943600" cy="274320"/>
-          </a:xfrm>
-          <a:prstGeom prst="rect">
-            <a:avLst/>
-          </a:prstGeom>
-          <a:noFill/>
-        </p:spPr>
-        <p:txBody>
-          <a:bodyPr wrap="square" anchor="t" lIns="0" rIns="0" tIns="0" bIns="0">
-            <a:spAutoFit/>
-          </a:bodyPr>
-          <a:lstStyle/>
-          <a:p>
-            <a:pPr algn="l"/>
-            <a:r>
-              <a:rPr sz="1000" b="1" i="0">
-                <a:solidFill>
-                  <a:srgbClr val="8F989D"/>
-                </a:solidFill>
-                <a:latin typeface="Calibri"/>
-              </a:rPr>
-              <a:t>Inicio 8:10 pm</a:t>
-            </a:r>
-          </a:p>
-        </p:txBody>
-      </p:sp>
-      <p:sp>
-        <p:nvSpPr>
-          <p:cNvPr id="7" name="TextBox 6"/>
-          <p:cNvSpPr txBox="1"/>
-          <p:nvPr/>
-        </p:nvSpPr>
-        <p:spPr>
-          <a:xfrm>
             <a:off x="11094415" y="6446520"/>
             <a:ext cx="548640" cy="274320"/>
           </a:xfrm>
@@ -10472,41 +10017,6 @@
         </p:nvSpPr>
         <p:spPr>
           <a:xfrm>
-            <a:off x="2194560" y="6446520"/>
-            <a:ext cx="5943600" cy="274320"/>
-          </a:xfrm>
-          <a:prstGeom prst="rect">
-            <a:avLst/>
-          </a:prstGeom>
-          <a:noFill/>
-        </p:spPr>
-        <p:txBody>
-          <a:bodyPr wrap="square" anchor="t" lIns="0" rIns="0" tIns="0" bIns="0">
-            <a:spAutoFit/>
-          </a:bodyPr>
-          <a:lstStyle/>
-          <a:p>
-            <a:pPr algn="l"/>
-            <a:r>
-              <a:rPr sz="1000" b="1" i="0">
-                <a:solidFill>
-                  <a:srgbClr val="8F989D"/>
-                </a:solidFill>
-                <a:latin typeface="Calibri"/>
-              </a:rPr>
-              <a:t>Inicio 8:10 pm</a:t>
-            </a:r>
-          </a:p>
-        </p:txBody>
-      </p:sp>
-      <p:sp>
-        <p:nvSpPr>
-          <p:cNvPr id="6" name="TextBox 5"/>
-          <p:cNvSpPr txBox="1"/>
-          <p:nvPr/>
-        </p:nvSpPr>
-        <p:spPr>
-          <a:xfrm>
             <a:off x="11094415" y="6446520"/>
             <a:ext cx="548640" cy="274320"/>
           </a:xfrm>
@@ -11488,41 +10998,6 @@
         </p:nvSpPr>
         <p:spPr>
           <a:xfrm>
-            <a:off x="2194560" y="6446520"/>
-            <a:ext cx="5943600" cy="274320"/>
-          </a:xfrm>
-          <a:prstGeom prst="rect">
-            <a:avLst/>
-          </a:prstGeom>
-          <a:noFill/>
-        </p:spPr>
-        <p:txBody>
-          <a:bodyPr wrap="square" anchor="t" lIns="0" rIns="0" tIns="0" bIns="0">
-            <a:spAutoFit/>
-          </a:bodyPr>
-          <a:lstStyle/>
-          <a:p>
-            <a:pPr algn="l"/>
-            <a:r>
-              <a:rPr sz="1000" b="1" i="0">
-                <a:solidFill>
-                  <a:srgbClr val="8F989D"/>
-                </a:solidFill>
-                <a:latin typeface="Calibri"/>
-              </a:rPr>
-              <a:t>Inicio 8:10 pm</a:t>
-            </a:r>
-          </a:p>
-        </p:txBody>
-      </p:sp>
-      <p:sp>
-        <p:nvSpPr>
-          <p:cNvPr id="7" name="TextBox 6"/>
-          <p:cNvSpPr txBox="1"/>
-          <p:nvPr/>
-        </p:nvSpPr>
-        <p:spPr>
-          <a:xfrm>
             <a:off x="11094415" y="6446520"/>
             <a:ext cx="548640" cy="274320"/>
           </a:xfrm>
@@ -12249,41 +11724,6 @@
         </p:nvSpPr>
         <p:spPr>
           <a:xfrm>
-            <a:off x="2194560" y="6446520"/>
-            <a:ext cx="5943600" cy="274320"/>
-          </a:xfrm>
-          <a:prstGeom prst="rect">
-            <a:avLst/>
-          </a:prstGeom>
-          <a:noFill/>
-        </p:spPr>
-        <p:txBody>
-          <a:bodyPr wrap="square" anchor="t" lIns="0" rIns="0" tIns="0" bIns="0">
-            <a:spAutoFit/>
-          </a:bodyPr>
-          <a:lstStyle/>
-          <a:p>
-            <a:pPr algn="l"/>
-            <a:r>
-              <a:rPr sz="1000" b="1" i="0">
-                <a:solidFill>
-                  <a:srgbClr val="8F989D"/>
-                </a:solidFill>
-                <a:latin typeface="Calibri"/>
-              </a:rPr>
-              <a:t>Inicio 8:10 pm</a:t>
-            </a:r>
-          </a:p>
-        </p:txBody>
-      </p:sp>
-      <p:sp>
-        <p:nvSpPr>
-          <p:cNvPr id="7" name="TextBox 6"/>
-          <p:cNvSpPr txBox="1"/>
-          <p:nvPr/>
-        </p:nvSpPr>
-        <p:spPr>
-          <a:xfrm>
             <a:off x="11094415" y="6446520"/>
             <a:ext cx="548640" cy="274320"/>
           </a:xfrm>
@@ -12796,41 +12236,6 @@
         </p:nvSpPr>
         <p:spPr>
           <a:xfrm>
-            <a:off x="2194560" y="6446520"/>
-            <a:ext cx="5943600" cy="274320"/>
-          </a:xfrm>
-          <a:prstGeom prst="rect">
-            <a:avLst/>
-          </a:prstGeom>
-          <a:noFill/>
-        </p:spPr>
-        <p:txBody>
-          <a:bodyPr wrap="square" anchor="t" lIns="0" rIns="0" tIns="0" bIns="0">
-            <a:spAutoFit/>
-          </a:bodyPr>
-          <a:lstStyle/>
-          <a:p>
-            <a:pPr algn="l"/>
-            <a:r>
-              <a:rPr sz="1000" b="1" i="0">
-                <a:solidFill>
-                  <a:srgbClr val="8F989D"/>
-                </a:solidFill>
-                <a:latin typeface="Calibri"/>
-              </a:rPr>
-              <a:t>Inicio 8:10 pm</a:t>
-            </a:r>
-          </a:p>
-        </p:txBody>
-      </p:sp>
-      <p:sp>
-        <p:nvSpPr>
-          <p:cNvPr id="11" name="TextBox 10"/>
-          <p:cNvSpPr txBox="1"/>
-          <p:nvPr/>
-        </p:nvSpPr>
-        <p:spPr>
-          <a:xfrm>
             <a:off x="11094415" y="6446520"/>
             <a:ext cx="548640" cy="274320"/>
           </a:xfrm>
@@ -13892,41 +13297,6 @@
       <p:sp>
         <p:nvSpPr>
           <p:cNvPr id="6" name="TextBox 5"/>
-          <p:cNvSpPr txBox="1"/>
-          <p:nvPr/>
-        </p:nvSpPr>
-        <p:spPr>
-          <a:xfrm>
-            <a:off x="2194560" y="6446520"/>
-            <a:ext cx="5943600" cy="274320"/>
-          </a:xfrm>
-          <a:prstGeom prst="rect">
-            <a:avLst/>
-          </a:prstGeom>
-          <a:noFill/>
-        </p:spPr>
-        <p:txBody>
-          <a:bodyPr wrap="square" anchor="t" lIns="0" rIns="0" tIns="0" bIns="0">
-            <a:spAutoFit/>
-          </a:bodyPr>
-          <a:lstStyle/>
-          <a:p>
-            <a:pPr algn="l"/>
-            <a:r>
-              <a:rPr sz="1000" b="1" i="0">
-                <a:solidFill>
-                  <a:srgbClr val="8F989D"/>
-                </a:solidFill>
-                <a:latin typeface="Calibri"/>
-              </a:rPr>
-              <a:t>Inicio 8:10 pm</a:t>
-            </a:r>
-          </a:p>
-        </p:txBody>
-      </p:sp>
-      <p:sp>
-        <p:nvSpPr>
-          <p:cNvPr id="7" name="TextBox 6"/>
           <p:cNvSpPr txBox="1"/>
           <p:nvPr/>
         </p:nvSpPr>

--- a/Especializacion/Proyecto I/Clases/Sesion 08 - Diseño metodológico paradigma, enfoque y alcance/Presentacion.pptx
+++ b/Especializacion/Proyecto I/Clases/Sesion 08 - Diseño metodológico paradigma, enfoque y alcance/Presentacion.pptx
@@ -23,6 +23,8 @@
     <p:sldId id="271" r:id="rId22"/>
     <p:sldId id="272" r:id="rId23"/>
     <p:sldId id="273" r:id="rId24"/>
+    <p:sldId id="274" r:id="rId25"/>
+    <p:sldId id="275" r:id="rId26"/>
   </p:sldIdLst>
   <p:sldSz cx="12191695" cy="6858000" type="screen4x3"/>
   <p:notesSz cx="6858000" cy="9144000"/>
@@ -6421,7 +6423,7 @@
                 </a:solidFill>
                 <a:latin typeface="Calibri"/>
               </a:rPr>
-              <a:t>TALLER · Su ficha metodológica (20 minutos)</a:t>
+              <a:t>TALLER · Su ficha metodológica</a:t>
             </a:r>
           </a:p>
         </p:txBody>
@@ -6434,8 +6436,8 @@
         </p:nvSpPr>
         <p:spPr>
           <a:xfrm>
-            <a:off x="640080" y="1691639"/>
-            <a:ext cx="10911535" cy="4617720"/>
+            <a:off x="640080" y="1280160"/>
+            <a:ext cx="10911535" cy="411480"/>
           </a:xfrm>
           <a:prstGeom prst="rect">
             <a:avLst/>
@@ -6448,6 +6450,41 @@
           </a:bodyPr>
           <a:lstStyle/>
           <a:p>
+            <a:pPr algn="ctr"/>
+            <a:r>
+              <a:rPr sz="1500" b="0" i="0">
+                <a:solidFill>
+                  <a:srgbClr val="2B2B2B"/>
+                </a:solidFill>
+                <a:latin typeface="Calibri"/>
+              </a:rPr>
+              <a:t>Por equipos, en un Google Doc nuevo · tengan la pregunta visible en pantalla cuando pase el Docente</a:t>
+            </a:r>
+          </a:p>
+        </p:txBody>
+      </p:sp>
+      <p:sp>
+        <p:nvSpPr>
+          <p:cNvPr id="5" name="TextBox 4"/>
+          <p:cNvSpPr txBox="1"/>
+          <p:nvPr/>
+        </p:nvSpPr>
+        <p:spPr>
+          <a:xfrm>
+            <a:off x="640080" y="2011679"/>
+            <a:ext cx="10911535" cy="4297680"/>
+          </a:xfrm>
+          <a:prstGeom prst="rect">
+            <a:avLst/>
+          </a:prstGeom>
+          <a:noFill/>
+        </p:spPr>
+        <p:txBody>
+          <a:bodyPr wrap="square" anchor="t" lIns="0" rIns="0" tIns="0" bIns="0">
+            <a:spAutoFit/>
+          </a:bodyPr>
+          <a:lstStyle/>
+          <a:p>
             <a:pPr>
               <a:spcAft>
                 <a:spcPts val="1000"/>
@@ -6469,7 +6506,7 @@
                 </a:solidFill>
                 <a:latin typeface="Calibri"/>
               </a:rPr>
-              <a:t>Consigna literal:</a:t>
+              <a:t>Al final tiene:</a:t>
             </a:r>
             <a:r>
               <a:rPr sz="1600" b="0" i="0">
@@ -6478,161 +6515,7 @@
                 </a:solidFill>
                 <a:latin typeface="Calibri"/>
               </a:rPr>
-              <a:t> en un Google Doc nuevo, arme la tabla de cinco columnas de la matriz de coherencia.</a:t>
-            </a:r>
-          </a:p>
-          <a:p>
-            <a:pPr lvl="1">
-              <a:spcAft>
-                <a:spcPts val="600"/>
-              </a:spcAft>
-            </a:pPr>
-            <a:r>
-              <a:rPr sz="1500" b="0" i="0">
-                <a:solidFill>
-                  <a:srgbClr val="2B2B2B"/>
-                </a:solidFill>
-                <a:latin typeface="Calibri"/>
-              </a:rPr>
-              <a:t>●   Columnas: </a:t>
-            </a:r>
-            <a:r>
-              <a:rPr sz="1500" b="1" i="0">
-                <a:solidFill>
-                  <a:srgbClr val="2B2B2B"/>
-                </a:solidFill>
-                <a:latin typeface="Calibri"/>
-              </a:rPr>
-              <a:t>Pregunta | Enfoque | Alcance | Técnica propuesta | Por qué es coherente</a:t>
-            </a:r>
-            <a:r>
-              <a:rPr sz="1500" b="0" i="0">
-                <a:solidFill>
-                  <a:srgbClr val="2B2B2B"/>
-                </a:solidFill>
-                <a:latin typeface="Calibri"/>
-              </a:rPr>
-              <a:t>.</a:t>
-            </a:r>
-          </a:p>
-          <a:p>
-            <a:pPr lvl="1">
-              <a:spcAft>
-                <a:spcPts val="600"/>
-              </a:spcAft>
-            </a:pPr>
-            <a:r>
-              <a:rPr sz="1500" b="0" i="0">
-                <a:solidFill>
-                  <a:srgbClr val="2B2B2B"/>
-                </a:solidFill>
-                <a:latin typeface="Calibri"/>
-              </a:rPr>
-              <a:t>●   Llene </a:t>
-            </a:r>
-            <a:r>
-              <a:rPr sz="1500" b="1" i="0">
-                <a:solidFill>
-                  <a:srgbClr val="2B2B2B"/>
-                </a:solidFill>
-                <a:latin typeface="Calibri"/>
-              </a:rPr>
-              <a:t>una sola fila</a:t>
-            </a:r>
-            <a:r>
-              <a:rPr sz="1500" b="0" i="0">
-                <a:solidFill>
-                  <a:srgbClr val="2B2B2B"/>
-                </a:solidFill>
-                <a:latin typeface="Calibri"/>
-              </a:rPr>
-              <a:t>, con SU pregunta real. No con la del ejemplo.</a:t>
-            </a:r>
-          </a:p>
-          <a:p>
-            <a:pPr lvl="1">
-              <a:spcAft>
-                <a:spcPts val="600"/>
-              </a:spcAft>
-            </a:pPr>
-            <a:r>
-              <a:rPr sz="1500" b="0" i="0">
-                <a:solidFill>
-                  <a:srgbClr val="2B2B2B"/>
-                </a:solidFill>
-                <a:latin typeface="Calibri"/>
-              </a:rPr>
-              <a:t>●   Debajo de la tabla, escriba el </a:t>
-            </a:r>
-            <a:r>
-              <a:rPr sz="1500" b="1" i="0">
-                <a:solidFill>
-                  <a:srgbClr val="2B2B2B"/>
-                </a:solidFill>
-                <a:latin typeface="Calibri"/>
-              </a:rPr>
-              <a:t>párrafo de paradigma</a:t>
-            </a:r>
-            <a:r>
-              <a:rPr sz="1500" b="0" i="0">
-                <a:solidFill>
-                  <a:srgbClr val="2B2B2B"/>
-                </a:solidFill>
-                <a:latin typeface="Calibri"/>
-              </a:rPr>
-              <a:t> (mínimo cuatro renglones) y el </a:t>
-            </a:r>
-            <a:r>
-              <a:rPr sz="1500" b="1" i="0">
-                <a:solidFill>
-                  <a:srgbClr val="2B2B2B"/>
-                </a:solidFill>
-                <a:latin typeface="Calibri"/>
-              </a:rPr>
-              <a:t>párrafo de justificación del enfoque</a:t>
-            </a:r>
-            <a:r>
-              <a:rPr sz="1500" b="0" i="0">
-                <a:solidFill>
-                  <a:srgbClr val="2B2B2B"/>
-                </a:solidFill>
-                <a:latin typeface="Calibri"/>
-              </a:rPr>
-              <a:t>.</a:t>
-            </a:r>
-          </a:p>
-          <a:p>
-            <a:pPr lvl="1">
-              <a:spcAft>
-                <a:spcPts val="600"/>
-              </a:spcAft>
-            </a:pPr>
-            <a:r>
-              <a:rPr sz="1500" b="0" i="0">
-                <a:solidFill>
-                  <a:srgbClr val="2B2B2B"/>
-                </a:solidFill>
-                <a:latin typeface="Calibri"/>
-              </a:rPr>
-              <a:t>●   En la justificación debe aparecer </a:t>
-            </a:r>
-            <a:r>
-              <a:rPr sz="1500" b="1" i="0">
-                <a:solidFill>
-                  <a:srgbClr val="2B2B2B"/>
-                </a:solidFill>
-                <a:latin typeface="Calibri"/>
-              </a:rPr>
-              <a:t>citado el verbo de su pregunta</a:t>
-            </a:r>
-            <a:r>
-              <a:rPr sz="1500" b="0" i="0">
-                <a:solidFill>
-                  <a:srgbClr val="2B2B2B"/>
-                </a:solidFill>
-                <a:latin typeface="Calibri"/>
-              </a:rPr>
-              <a:t>: "dado que la pregunta indaga *en qué medida*…".</a:t>
+              <a:t> la fila de su matriz de coherencia más el párrafo de paradigma y el de justificación del enfoque.</a:t>
             </a:r>
           </a:p>
           <a:p>
@@ -6657,7 +6540,7 @@
                 </a:solidFill>
                 <a:latin typeface="Calibri"/>
               </a:rPr>
-              <a:t>Criterio de éxito verificable:</a:t>
+              <a:t>Paso 1</a:t>
             </a:r>
             <a:r>
               <a:rPr sz="1600" b="0" i="0">
@@ -6666,7 +6549,7 @@
                 </a:solidFill>
                 <a:latin typeface="Calibri"/>
               </a:rPr>
-              <a:t> un lector que solo vea su tabla puede </a:t>
+              <a:t> · Arme la tabla de cinco columnas: </a:t>
             </a:r>
             <a:r>
               <a:rPr sz="1600" b="1" i="0">
@@ -6675,7 +6558,7 @@
                 </a:solidFill>
                 <a:latin typeface="Calibri"/>
               </a:rPr>
-              <a:t>predecir el tipo de instrumento</a:t>
+              <a:t>Pregunta | Enfoque | Alcance | Técnica propuesta | Por qué es coherente</a:t>
             </a:r>
             <a:r>
               <a:rPr sz="1600" b="0" i="0">
@@ -6684,7 +6567,7 @@
                 </a:solidFill>
                 <a:latin typeface="Calibri"/>
               </a:rPr>
-              <a:t> que usted usaría.</a:t>
+              <a:t>.</a:t>
             </a:r>
           </a:p>
           <a:p>
@@ -6700,7 +6583,7 @@
                 </a:solidFill>
                 <a:latin typeface="Calibri"/>
               </a:rPr>
-              <a:t>–   Si al llenar la fila descubre que su pregunta no encaja en ninguna ruta, no fuerce el método: </a:t>
+              <a:t>–   </a:t>
             </a:r>
             <a:r>
               <a:rPr sz="1600" b="1" i="0">
@@ -6709,7 +6592,7 @@
                 </a:solidFill>
                 <a:latin typeface="Calibri"/>
               </a:rPr>
-              <a:t>corrija la pregunta</a:t>
+              <a:t>Paso 2</a:t>
             </a:r>
             <a:r>
               <a:rPr sz="1600" b="0" i="0">
@@ -6718,7 +6601,43 @@
                 </a:solidFill>
                 <a:latin typeface="Calibri"/>
               </a:rPr>
-              <a:t>. Eso también es avance.</a:t>
+              <a:t> · Llene </a:t>
+            </a:r>
+            <a:r>
+              <a:rPr sz="1600" b="1" i="0">
+                <a:solidFill>
+                  <a:srgbClr val="2B2B2B"/>
+                </a:solidFill>
+                <a:latin typeface="Calibri"/>
+              </a:rPr>
+              <a:t>una sola fila</a:t>
+            </a:r>
+            <a:r>
+              <a:rPr sz="1600" b="0" i="0">
+                <a:solidFill>
+                  <a:srgbClr val="2B2B2B"/>
+                </a:solidFill>
+                <a:latin typeface="Calibri"/>
+              </a:rPr>
+              <a:t>, con </a:t>
+            </a:r>
+            <a:r>
+              <a:rPr sz="1600" b="1" i="0">
+                <a:solidFill>
+                  <a:srgbClr val="2B2B2B"/>
+                </a:solidFill>
+                <a:latin typeface="Calibri"/>
+              </a:rPr>
+              <a:t>SU</a:t>
+            </a:r>
+            <a:r>
+              <a:rPr sz="1600" b="0" i="0">
+                <a:solidFill>
+                  <a:srgbClr val="2B2B2B"/>
+                </a:solidFill>
+                <a:latin typeface="Calibri"/>
+              </a:rPr>
+              <a:t> pregunta real. No con la del ejemplo.</a:t>
             </a:r>
           </a:p>
           <a:p>
@@ -6734,7 +6653,61 @@
                 </a:solidFill>
                 <a:latin typeface="Calibri"/>
               </a:rPr>
-              <a:t>–   El Docente circula por los equipos; tenga la pregunta visible en pantalla cuando llegue su turno.</a:t>
+              <a:t>–   </a:t>
+            </a:r>
+            <a:r>
+              <a:rPr sz="1600" b="1" i="0">
+                <a:solidFill>
+                  <a:srgbClr val="2B2B2B"/>
+                </a:solidFill>
+                <a:latin typeface="Calibri"/>
+              </a:rPr>
+              <a:t>Paso 3</a:t>
+            </a:r>
+            <a:r>
+              <a:rPr sz="1600" b="0" i="0">
+                <a:solidFill>
+                  <a:srgbClr val="2B2B2B"/>
+                </a:solidFill>
+                <a:latin typeface="Calibri"/>
+              </a:rPr>
+              <a:t> · Debajo de la tabla, escriba el </a:t>
+            </a:r>
+            <a:r>
+              <a:rPr sz="1600" b="1" i="0">
+                <a:solidFill>
+                  <a:srgbClr val="2B2B2B"/>
+                </a:solidFill>
+                <a:latin typeface="Calibri"/>
+              </a:rPr>
+              <a:t>párrafo de paradigma</a:t>
+            </a:r>
+            <a:r>
+              <a:rPr sz="1600" b="0" i="0">
+                <a:solidFill>
+                  <a:srgbClr val="2B2B2B"/>
+                </a:solidFill>
+                <a:latin typeface="Calibri"/>
+              </a:rPr>
+              <a:t> —mínimo cuatro renglones— y el </a:t>
+            </a:r>
+            <a:r>
+              <a:rPr sz="1600" b="1" i="0">
+                <a:solidFill>
+                  <a:srgbClr val="2B2B2B"/>
+                </a:solidFill>
+                <a:latin typeface="Calibri"/>
+              </a:rPr>
+              <a:t>párrafo de justificación del enfoque</a:t>
+            </a:r>
+            <a:r>
+              <a:rPr sz="1600" b="0" i="0">
+                <a:solidFill>
+                  <a:srgbClr val="2B2B2B"/>
+                </a:solidFill>
+                <a:latin typeface="Calibri"/>
+              </a:rPr>
+              <a:t>.</a:t>
             </a:r>
           </a:p>
           <a:p>
@@ -6759,7 +6732,7 @@
                 </a:solidFill>
                 <a:latin typeface="Calibri"/>
               </a:rPr>
-              <a:t>Entrega:</a:t>
+              <a:t>Paso 4</a:t>
             </a:r>
             <a:r>
               <a:rPr sz="1600" b="0" i="0">
@@ -6768,14 +6741,84 @@
                 </a:solidFill>
                 <a:latin typeface="Calibri"/>
               </a:rPr>
-              <a:t> suba el archivo como `S08_DisenoMetodologico_Apellidos` en [URL CDigital — campus del curso pendiente].</a:t>
-            </a:r>
-          </a:p>
-        </p:txBody>
-      </p:sp>
-      <p:sp>
-        <p:nvSpPr>
-          <p:cNvPr id="5" name="TextBox 4"/>
+              <a:t> · En la justificación debe aparecer </a:t>
+            </a:r>
+            <a:r>
+              <a:rPr sz="1600" b="1" i="0">
+                <a:solidFill>
+                  <a:srgbClr val="2B2B2B"/>
+                </a:solidFill>
+                <a:latin typeface="Calibri"/>
+              </a:rPr>
+              <a:t>citado el verbo de su pregunta</a:t>
+            </a:r>
+            <a:r>
+              <a:rPr sz="1600" b="0" i="0">
+                <a:solidFill>
+                  <a:srgbClr val="2B2B2B"/>
+                </a:solidFill>
+                <a:latin typeface="Calibri"/>
+              </a:rPr>
+              <a:t>: «dado que la pregunta indaga *en qué medida*…».</a:t>
+            </a:r>
+          </a:p>
+          <a:p>
+            <a:pPr>
+              <a:spcAft>
+                <a:spcPts val="1000"/>
+              </a:spcAft>
+            </a:pPr>
+            <a:r>
+              <a:rPr sz="1600" b="0" i="0">
+                <a:solidFill>
+                  <a:srgbClr val="2B2B2B"/>
+                </a:solidFill>
+                <a:latin typeface="Calibri"/>
+              </a:rPr>
+              <a:t>–   </a:t>
+            </a:r>
+            <a:r>
+              <a:rPr sz="1600" b="1" i="0">
+                <a:solidFill>
+                  <a:srgbClr val="2B2B2B"/>
+                </a:solidFill>
+                <a:latin typeface="Calibri"/>
+              </a:rPr>
+              <a:t>En clase, sin falta:</a:t>
+            </a:r>
+            <a:r>
+              <a:rPr sz="1600" b="0" i="0">
+                <a:solidFill>
+                  <a:srgbClr val="2B2B2B"/>
+                </a:solidFill>
+                <a:latin typeface="Calibri"/>
+              </a:rPr>
+              <a:t> los </a:t>
+            </a:r>
+            <a:r>
+              <a:rPr sz="1600" b="1" i="0">
+                <a:solidFill>
+                  <a:srgbClr val="2B2B2B"/>
+                </a:solidFill>
+                <a:latin typeface="Calibri"/>
+              </a:rPr>
+              <a:t>pasos 1 a 2</a:t>
+            </a:r>
+            <a:r>
+              <a:rPr sz="1600" b="0" i="0">
+                <a:solidFill>
+                  <a:srgbClr val="2B2B2B"/>
+                </a:solidFill>
+                <a:latin typeface="Calibri"/>
+              </a:rPr>
+              <a:t>. Del 3 en adelante puede quedar en trabajo autónomo, pero antes de la próxima sesión.</a:t>
+            </a:r>
+          </a:p>
+        </p:txBody>
+      </p:sp>
+      <p:sp>
+        <p:nvSpPr>
+          <p:cNvPr id="6" name="TextBox 5"/>
           <p:cNvSpPr txBox="1"/>
           <p:nvPr/>
         </p:nvSpPr>
@@ -6908,7 +6951,7 @@
                 </a:solidFill>
                 <a:latin typeface="Calibri"/>
               </a:rPr>
-              <a:t>Checklist de autoevaluación antes de entregar</a:t>
+              <a:t>TALLER · cómo se revisa y dónde se entrega</a:t>
             </a:r>
           </a:p>
         </p:txBody>
@@ -6921,8 +6964,8 @@
         </p:nvSpPr>
         <p:spPr>
           <a:xfrm>
-            <a:off x="640080" y="1691639"/>
-            <a:ext cx="10911535" cy="4617720"/>
+            <a:off x="640080" y="1280160"/>
+            <a:ext cx="10911535" cy="411480"/>
           </a:xfrm>
           <a:prstGeom prst="rect">
             <a:avLst/>
@@ -6935,6 +6978,41 @@
           </a:bodyPr>
           <a:lstStyle/>
           <a:p>
+            <a:pPr algn="ctr"/>
+            <a:r>
+              <a:rPr sz="1500" b="0" i="0">
+                <a:solidFill>
+                  <a:srgbClr val="2B2B2B"/>
+                </a:solidFill>
+                <a:latin typeface="Calibri"/>
+              </a:rPr>
+              <a:t>Su ficha metodológica</a:t>
+            </a:r>
+          </a:p>
+        </p:txBody>
+      </p:sp>
+      <p:sp>
+        <p:nvSpPr>
+          <p:cNvPr id="5" name="TextBox 4"/>
+          <p:cNvSpPr txBox="1"/>
+          <p:nvPr/>
+        </p:nvSpPr>
+        <p:spPr>
+          <a:xfrm>
+            <a:off x="640080" y="2011679"/>
+            <a:ext cx="10911535" cy="4297680"/>
+          </a:xfrm>
+          <a:prstGeom prst="rect">
+            <a:avLst/>
+          </a:prstGeom>
+          <a:noFill/>
+        </p:spPr>
+        <p:txBody>
+          <a:bodyPr wrap="square" anchor="t" lIns="0" rIns="0" tIns="0" bIns="0">
+            <a:spAutoFit/>
+          </a:bodyPr>
+          <a:lstStyle/>
+          <a:p>
             <a:pPr>
               <a:spcAft>
                 <a:spcPts val="1000"/>
@@ -6947,7 +7025,93 @@
                 </a:solidFill>
                 <a:latin typeface="Calibri"/>
               </a:rPr>
-              <a:t>–   Mi pregunta está copiada literalmente al inicio del capítulo metodológico.</a:t>
+              <a:t>–   </a:t>
+            </a:r>
+            <a:r>
+              <a:rPr sz="1600" b="1" i="0">
+                <a:solidFill>
+                  <a:srgbClr val="2B2B2B"/>
+                </a:solidFill>
+                <a:latin typeface="Calibri"/>
+              </a:rPr>
+              <a:t>Quedó bien si</a:t>
+            </a:r>
+            <a:r>
+              <a:rPr sz="1600" b="0" i="0">
+                <a:solidFill>
+                  <a:srgbClr val="2B2B2B"/>
+                </a:solidFill>
+                <a:latin typeface="Calibri"/>
+              </a:rPr>
+              <a:t> —compruébelo usted antes de cerrar el documento—:</a:t>
+            </a:r>
+          </a:p>
+          <a:p>
+            <a:pPr lvl="1">
+              <a:spcAft>
+                <a:spcPts val="600"/>
+              </a:spcAft>
+            </a:pPr>
+            <a:r>
+              <a:rPr sz="1500" b="0" i="0">
+                <a:solidFill>
+                  <a:srgbClr val="2B2B2B"/>
+                </a:solidFill>
+                <a:latin typeface="Calibri"/>
+              </a:rPr>
+              <a:t>●   Un lector que </a:t>
+            </a:r>
+            <a:r>
+              <a:rPr sz="1500" b="1" i="0">
+                <a:solidFill>
+                  <a:srgbClr val="2B2B2B"/>
+                </a:solidFill>
+                <a:latin typeface="Calibri"/>
+              </a:rPr>
+              <a:t>solo</a:t>
+            </a:r>
+            <a:r>
+              <a:rPr sz="1500" b="0" i="0">
+                <a:solidFill>
+                  <a:srgbClr val="2B2B2B"/>
+                </a:solidFill>
+                <a:latin typeface="Calibri"/>
+              </a:rPr>
+              <a:t> vea su tabla puede </a:t>
+            </a:r>
+            <a:r>
+              <a:rPr sz="1500" b="1" i="0">
+                <a:solidFill>
+                  <a:srgbClr val="2B2B2B"/>
+                </a:solidFill>
+                <a:latin typeface="Calibri"/>
+              </a:rPr>
+              <a:t>predecir el tipo de instrumento</a:t>
+            </a:r>
+            <a:r>
+              <a:rPr sz="1500" b="0" i="0">
+                <a:solidFill>
+                  <a:srgbClr val="2B2B2B"/>
+                </a:solidFill>
+                <a:latin typeface="Calibri"/>
+              </a:rPr>
+              <a:t> que usted usaría.</a:t>
+            </a:r>
+          </a:p>
+          <a:p>
+            <a:pPr lvl="1">
+              <a:spcAft>
+                <a:spcPts val="600"/>
+              </a:spcAft>
+            </a:pPr>
+            <a:r>
+              <a:rPr sz="1500" b="0" i="0">
+                <a:solidFill>
+                  <a:srgbClr val="2B2B2B"/>
+                </a:solidFill>
+                <a:latin typeface="Calibri"/>
+              </a:rPr>
+              <a:t>●   La justificación cita el verbo de su propia pregunta.</a:t>
             </a:r>
           </a:p>
           <a:p>
@@ -6963,7 +7127,7 @@
                 </a:solidFill>
                 <a:latin typeface="Calibri"/>
               </a:rPr>
-              <a:t>–   Declaré </a:t>
+              <a:t>–   </a:t>
             </a:r>
             <a:r>
               <a:rPr sz="1600" b="1" i="0">
@@ -6972,7 +7136,7 @@
                 </a:solidFill>
                 <a:latin typeface="Calibri"/>
               </a:rPr>
-              <a:t>paradigma, enfoque, alcance y diseño</a:t>
+              <a:t>Plan B:</a:t>
             </a:r>
             <a:r>
               <a:rPr sz="1600" b="0" i="0">
@@ -6981,7 +7145,25 @@
                 </a:solidFill>
                 <a:latin typeface="Calibri"/>
               </a:rPr>
-              <a:t> por separado, sin mezclarlos en una sola frase.</a:t>
+              <a:t> Si al llenar la fila descubre que su pregunta no encaja en ninguna ruta, </a:t>
+            </a:r>
+            <a:r>
+              <a:rPr sz="1600" b="1" i="0">
+                <a:solidFill>
+                  <a:srgbClr val="2B2B2B"/>
+                </a:solidFill>
+                <a:latin typeface="Calibri"/>
+              </a:rPr>
+              <a:t>no fuerce el método: corrija la pregunta</a:t>
+            </a:r>
+            <a:r>
+              <a:rPr sz="1600" b="0" i="0">
+                <a:solidFill>
+                  <a:srgbClr val="2B2B2B"/>
+                </a:solidFill>
+                <a:latin typeface="Calibri"/>
+              </a:rPr>
+              <a:t>. Eso también es avance.</a:t>
             </a:r>
           </a:p>
           <a:p>
@@ -6997,7 +7179,7 @@
                 </a:solidFill>
                 <a:latin typeface="Calibri"/>
               </a:rPr>
-              <a:t>–   Mi justificación del enfoque </a:t>
+              <a:t>–   </a:t>
             </a:r>
             <a:r>
               <a:rPr sz="1600" b="1" i="0">
@@ -7006,7 +7188,7 @@
                 </a:solidFill>
                 <a:latin typeface="Calibri"/>
               </a:rPr>
-              <a:t>cita el verbo de mi pregunta</a:t>
+              <a:t>Hoy no se sube nada al aula:</a:t>
             </a:r>
             <a:r>
               <a:rPr sz="1600" b="0" i="0">
@@ -7015,7 +7197,25 @@
                 </a:solidFill>
                 <a:latin typeface="Calibri"/>
               </a:rPr>
-              <a:t>, no dice "porque es el más adecuado".</a:t>
+              <a:t> guarde `S08_DisenoMetodologico_Apellidos` (Google Doc o PDF) en su Drive y tráigalo a la próxima sesión. Es un </a:t>
+            </a:r>
+            <a:r>
+              <a:rPr sz="1600" b="1" i="0">
+                <a:solidFill>
+                  <a:srgbClr val="2B2B2B"/>
+                </a:solidFill>
+                <a:latin typeface="Calibri"/>
+              </a:rPr>
+              <a:t>avance formativo</a:t>
+            </a:r>
+            <a:r>
+              <a:rPr sz="1600" b="0" i="0">
+                <a:solidFill>
+                  <a:srgbClr val="2B2B2B"/>
+                </a:solidFill>
+                <a:latin typeface="Calibri"/>
+              </a:rPr>
+              <a:t>, se revisa en clase.</a:t>
             </a:r>
           </a:p>
           <a:p>
@@ -7031,15 +7231,17 @@
                 </a:solidFill>
                 <a:latin typeface="Calibri"/>
               </a:rPr>
-              <a:t>–   No confundo enfoque con alcance: escribí, por ejemplo, "cuantitativo, de alcance descriptivo".</a:t>
-            </a:r>
-          </a:p>
-          <a:p>
-            <a:pPr>
-              <a:spcAft>
-                <a:spcPts val="1000"/>
-              </a:spcAft>
-            </a:pPr>
+              <a:t>–   </a:t>
+            </a:r>
+            <a:r>
+              <a:rPr sz="1600" b="1" i="0">
+                <a:solidFill>
+                  <a:srgbClr val="2B2B2B"/>
+                </a:solidFill>
+                <a:latin typeface="Calibri"/>
+              </a:rPr>
+              <a:t>Esto alimenta:</a:t>
+            </a:r>
             <a:r>
               <a:rPr sz="1600" b="0" i="0">
                 <a:solidFill>
@@ -7047,7 +7249,7 @@
                 </a:solidFill>
                 <a:latin typeface="Calibri"/>
               </a:rPr>
-              <a:t>–   Si escribí </a:t>
+              <a:t> </a:t>
             </a:r>
             <a:r>
               <a:rPr sz="1600" b="1" i="0">
@@ -7056,7 +7258,7 @@
                 </a:solidFill>
                 <a:latin typeface="Calibri"/>
               </a:rPr>
-              <a:t>mixto</a:t>
+              <a:t>ACA FINAL</a:t>
             </a:r>
             <a:r>
               <a:rPr sz="1600" b="0" i="0">
@@ -7065,15 +7267,17 @@
                 </a:solidFill>
                 <a:latin typeface="Calibri"/>
               </a:rPr>
-              <a:t>, expliqué qué parte de la pregunta no responde cada ruta por separado.</a:t>
-            </a:r>
-          </a:p>
-          <a:p>
-            <a:pPr>
-              <a:spcAft>
-                <a:spcPts val="1000"/>
-              </a:spcAft>
-            </a:pPr>
+              <a:t> —tarea, 42%—, el documento que </a:t>
+            </a:r>
+            <a:r>
+              <a:rPr sz="1600" b="1" i="0">
+                <a:solidFill>
+                  <a:srgbClr val="2B2B2B"/>
+                </a:solidFill>
+                <a:latin typeface="Calibri"/>
+              </a:rPr>
+              <a:t>sí</a:t>
+            </a:r>
             <a:r>
               <a:rPr sz="1600" b="0" i="0">
                 <a:solidFill>
@@ -7081,7 +7285,7 @@
                 </a:solidFill>
                 <a:latin typeface="Calibri"/>
               </a:rPr>
-              <a:t>–   Elegí </a:t>
+              <a:t> recibe </a:t>
             </a:r>
             <a:r>
               <a:rPr sz="1600" b="1" i="0">
@@ -7090,7 +7294,7 @@
                 </a:solidFill>
                 <a:latin typeface="Calibri"/>
               </a:rPr>
-              <a:t>un solo diseño</a:t>
+              <a:t>CDigital</a:t>
             </a:r>
             <a:r>
               <a:rPr sz="1600" b="0" i="0">
@@ -7099,15 +7303,17 @@
                 </a:solidFill>
                 <a:latin typeface="Calibri"/>
               </a:rPr>
-              <a:t> y lo describí en términos operativos, no como lista de opciones.</a:t>
-            </a:r>
-          </a:p>
-          <a:p>
-            <a:pPr>
-              <a:spcAft>
-                <a:spcPts val="1000"/>
-              </a:spcAft>
-            </a:pPr>
+              <a:t>; cierra en la semana de la </a:t>
+            </a:r>
+            <a:r>
+              <a:rPr sz="1600" b="1" i="0">
+                <a:solidFill>
+                  <a:srgbClr val="2B2B2B"/>
+                </a:solidFill>
+                <a:latin typeface="Calibri"/>
+              </a:rPr>
+              <a:t>Sesión 10</a:t>
+            </a:r>
             <a:r>
               <a:rPr sz="1600" b="0" i="0">
                 <a:solidFill>
@@ -7115,100 +7321,14 @@
                 </a:solidFill>
                 <a:latin typeface="Calibri"/>
               </a:rPr>
-              <a:t>–   Todos los verbos del capítulo están en </a:t>
-            </a:r>
-            <a:r>
-              <a:rPr sz="1600" b="1" i="0">
-                <a:solidFill>
-                  <a:srgbClr val="2B2B2B"/>
-                </a:solidFill>
-                <a:latin typeface="Calibri"/>
-              </a:rPr>
-              <a:t>condicional o futuro</a:t>
-            </a:r>
-            <a:r>
-              <a:rPr sz="1600" b="0" i="0">
-                <a:solidFill>
-                  <a:srgbClr val="2B2B2B"/>
-                </a:solidFill>
-                <a:latin typeface="Calibri"/>
-              </a:rPr>
-              <a:t>: nada aparece como ya ejecutado.</a:t>
-            </a:r>
-          </a:p>
-          <a:p>
-            <a:pPr>
-              <a:spcAft>
-                <a:spcPts val="1000"/>
-              </a:spcAft>
-            </a:pPr>
-            <a:r>
-              <a:rPr sz="1600" b="0" i="0">
-                <a:solidFill>
-                  <a:srgbClr val="2B2B2B"/>
-                </a:solidFill>
-                <a:latin typeface="Calibri"/>
-              </a:rPr>
-              <a:t>–   Mis </a:t>
-            </a:r>
-            <a:r>
-              <a:rPr sz="1600" b="1" i="0">
-                <a:solidFill>
-                  <a:srgbClr val="2B2B2B"/>
-                </a:solidFill>
-                <a:latin typeface="Calibri"/>
-              </a:rPr>
-              <a:t>objetivos específicos</a:t>
-            </a:r>
-            <a:r>
-              <a:rPr sz="1600" b="0" i="0">
-                <a:solidFill>
-                  <a:srgbClr val="2B2B2B"/>
-                </a:solidFill>
-                <a:latin typeface="Calibri"/>
-              </a:rPr>
-              <a:t> siguen alineados con la ruta que acabo de elegir.</a:t>
-            </a:r>
-          </a:p>
-          <a:p>
-            <a:pPr>
-              <a:spcAft>
-                <a:spcPts val="1000"/>
-              </a:spcAft>
-            </a:pPr>
-            <a:r>
-              <a:rPr sz="1600" b="0" i="0">
-                <a:solidFill>
-                  <a:srgbClr val="2B2B2B"/>
-                </a:solidFill>
-                <a:latin typeface="Calibri"/>
-              </a:rPr>
-              <a:t>–   Respaldé la elección metodológica con </a:t>
-            </a:r>
-            <a:r>
-              <a:rPr sz="1600" b="1" i="0">
-                <a:solidFill>
-                  <a:srgbClr val="2B2B2B"/>
-                </a:solidFill>
-                <a:latin typeface="Calibri"/>
-              </a:rPr>
-              <a:t>al menos una cita</a:t>
-            </a:r>
-            <a:r>
-              <a:rPr sz="1600" b="0" i="0">
-                <a:solidFill>
-                  <a:srgbClr val="2B2B2B"/>
-                </a:solidFill>
-                <a:latin typeface="Calibri"/>
-              </a:rPr>
-              <a:t> al texto guía, en APA 7.</a:t>
-            </a:r>
-          </a:p>
-        </p:txBody>
-      </p:sp>
-      <p:sp>
-        <p:nvSpPr>
-          <p:cNvPr id="5" name="TextBox 4"/>
+              <a:t>.</a:t>
+            </a:r>
+          </a:p>
+        </p:txBody>
+      </p:sp>
+      <p:sp>
+        <p:nvSpPr>
+          <p:cNvPr id="6" name="TextBox 5"/>
           <p:cNvSpPr txBox="1"/>
           <p:nvPr/>
         </p:nvSpPr>
@@ -7341,7 +7461,7 @@
                 </a:solidFill>
                 <a:latin typeface="Calibri"/>
               </a:rPr>
-              <a:t>Trabajo autónomo y qué viene después</a:t>
+              <a:t>Checklist de autoevaluación antes de entregar</a:t>
             </a:r>
           </a:p>
         </p:txBody>
@@ -7380,100 +7500,7 @@
                 </a:solidFill>
                 <a:latin typeface="Calibri"/>
               </a:rPr>
-              <a:t>–   </a:t>
-            </a:r>
-            <a:r>
-              <a:rPr sz="1600" b="1" i="0">
-                <a:solidFill>
-                  <a:srgbClr val="2B2B2B"/>
-                </a:solidFill>
-                <a:latin typeface="Calibri"/>
-              </a:rPr>
-              <a:t>Autónomo de esta semana:</a:t>
-            </a:r>
-          </a:p>
-          <a:p>
-            <a:pPr lvl="1">
-              <a:spcAft>
-                <a:spcPts val="600"/>
-              </a:spcAft>
-            </a:pPr>
-            <a:r>
-              <a:rPr sz="1500" b="0" i="0">
-                <a:solidFill>
-                  <a:srgbClr val="2B2B2B"/>
-                </a:solidFill>
-                <a:latin typeface="Calibri"/>
-              </a:rPr>
-              <a:t>●   Convierta la fila de su matriz en </a:t>
-            </a:r>
-            <a:r>
-              <a:rPr sz="1500" b="1" i="0">
-                <a:solidFill>
-                  <a:srgbClr val="2B2B2B"/>
-                </a:solidFill>
-                <a:latin typeface="Calibri"/>
-              </a:rPr>
-              <a:t>prosa</a:t>
-            </a:r>
-            <a:r>
-              <a:rPr sz="1500" b="0" i="0">
-                <a:solidFill>
-                  <a:srgbClr val="2B2B2B"/>
-                </a:solidFill>
-                <a:latin typeface="Calibri"/>
-              </a:rPr>
-              <a:t>: el capítulo metodológico se entrega redactado, la tabla es su borrador de control.</a:t>
-            </a:r>
-          </a:p>
-          <a:p>
-            <a:pPr lvl="1">
-              <a:spcAft>
-                <a:spcPts val="600"/>
-              </a:spcAft>
-            </a:pPr>
-            <a:r>
-              <a:rPr sz="1500" b="0" i="0">
-                <a:solidFill>
-                  <a:srgbClr val="2B2B2B"/>
-                </a:solidFill>
-                <a:latin typeface="Calibri"/>
-              </a:rPr>
-              <a:t>●   Revise si algún </a:t>
-            </a:r>
-            <a:r>
-              <a:rPr sz="1500" b="1" i="0">
-                <a:solidFill>
-                  <a:srgbClr val="2B2B2B"/>
-                </a:solidFill>
-                <a:latin typeface="Calibri"/>
-              </a:rPr>
-              <a:t>objetivo específico</a:t>
-            </a:r>
-            <a:r>
-              <a:rPr sz="1500" b="0" i="0">
-                <a:solidFill>
-                  <a:srgbClr val="2B2B2B"/>
-                </a:solidFill>
-                <a:latin typeface="Calibri"/>
-              </a:rPr>
-              <a:t> quedó huérfano de método; si lo hay, o se ajusta el objetivo o se amplía la técnica.</a:t>
-            </a:r>
-          </a:p>
-          <a:p>
-            <a:pPr lvl="1">
-              <a:spcAft>
-                <a:spcPts val="600"/>
-              </a:spcAft>
-            </a:pPr>
-            <a:r>
-              <a:rPr sz="1500" b="0" i="0">
-                <a:solidFill>
-                  <a:srgbClr val="2B2B2B"/>
-                </a:solidFill>
-                <a:latin typeface="Calibri"/>
-              </a:rPr>
-              <a:t>●   Anote las dudas metodológicas concretas para llevarlas a la tutoría de la semana.</a:t>
+              <a:t>–   Mi pregunta está copiada literalmente al inicio del capítulo metodológico.</a:t>
             </a:r>
           </a:p>
           <a:p>
@@ -7489,7 +7516,7 @@
                 </a:solidFill>
                 <a:latin typeface="Calibri"/>
               </a:rPr>
-              <a:t>–   </a:t>
+              <a:t>–   Declaré </a:t>
             </a:r>
             <a:r>
               <a:rPr sz="1600" b="1" i="0">
@@ -7498,127 +7525,16 @@
                 </a:solidFill>
                 <a:latin typeface="Calibri"/>
               </a:rPr>
-              <a:t>En la próxima sesión aterrizamos el método a personas y herramientas:</a:t>
-            </a:r>
-          </a:p>
-          <a:p>
-            <a:pPr lvl="1">
-              <a:spcAft>
-                <a:spcPts val="600"/>
-              </a:spcAft>
-            </a:pPr>
-            <a:r>
-              <a:rPr sz="1500" b="0" i="0">
-                <a:solidFill>
-                  <a:srgbClr val="2B2B2B"/>
-                </a:solidFill>
-                <a:latin typeface="Calibri"/>
-              </a:rPr>
-              <a:t>●   </a:t>
-            </a:r>
-            <a:r>
-              <a:rPr sz="1500" b="1" i="0">
-                <a:solidFill>
-                  <a:srgbClr val="2B2B2B"/>
-                </a:solidFill>
-                <a:latin typeface="Calibri"/>
-              </a:rPr>
-              <a:t>Población y muestra</a:t>
-            </a:r>
-            <a:r>
-              <a:rPr sz="1500" b="0" i="0">
-                <a:solidFill>
-                  <a:srgbClr val="2B2B2B"/>
-                </a:solidFill>
-                <a:latin typeface="Calibri"/>
-              </a:rPr>
-              <a:t> propuestas, con criterios de inclusión y exclusión.</a:t>
-            </a:r>
-          </a:p>
-          <a:p>
-            <a:pPr lvl="1">
-              <a:spcAft>
-                <a:spcPts val="600"/>
-              </a:spcAft>
-            </a:pPr>
-            <a:r>
-              <a:rPr sz="1500" b="0" i="0">
-                <a:solidFill>
-                  <a:srgbClr val="2B2B2B"/>
-                </a:solidFill>
-                <a:latin typeface="Calibri"/>
-              </a:rPr>
-              <a:t>●   </a:t>
-            </a:r>
-            <a:r>
-              <a:rPr sz="1500" b="1" i="0">
-                <a:solidFill>
-                  <a:srgbClr val="2B2B2B"/>
-                </a:solidFill>
-                <a:latin typeface="Calibri"/>
-              </a:rPr>
-              <a:t>Técnicas e instrumentos</a:t>
-            </a:r>
-            <a:r>
-              <a:rPr sz="1500" b="0" i="0">
-                <a:solidFill>
-                  <a:srgbClr val="2B2B2B"/>
-                </a:solidFill>
-                <a:latin typeface="Calibri"/>
-              </a:rPr>
-              <a:t> — que en Proyecto I se </a:t>
-            </a:r>
-            <a:r>
-              <a:rPr sz="1500" b="1" i="0">
-                <a:solidFill>
-                  <a:srgbClr val="2B2B2B"/>
-                </a:solidFill>
-                <a:latin typeface="Calibri"/>
-              </a:rPr>
-              <a:t>bosquejan y proponen</a:t>
-            </a:r>
-            <a:r>
-              <a:rPr sz="1500" b="0" i="0">
-                <a:solidFill>
-                  <a:srgbClr val="2B2B2B"/>
-                </a:solidFill>
-                <a:latin typeface="Calibri"/>
-              </a:rPr>
-              <a:t>, nunca se aplican.</a:t>
-            </a:r>
-          </a:p>
-          <a:p>
-            <a:pPr lvl="1">
-              <a:spcAft>
-                <a:spcPts val="600"/>
-              </a:spcAft>
-            </a:pPr>
-            <a:r>
-              <a:rPr sz="1500" b="0" i="0">
-                <a:solidFill>
-                  <a:srgbClr val="2B2B2B"/>
-                </a:solidFill>
-                <a:latin typeface="Calibri"/>
-              </a:rPr>
-              <a:t>●   Traiga decidida su </a:t>
-            </a:r>
-            <a:r>
-              <a:rPr sz="1500" b="1" i="0">
-                <a:solidFill>
-                  <a:srgbClr val="2B2B2B"/>
-                </a:solidFill>
-                <a:latin typeface="Calibri"/>
-              </a:rPr>
-              <a:t>técnica tentativa</a:t>
-            </a:r>
-            <a:r>
-              <a:rPr sz="1500" b="0" i="0">
-                <a:solidFill>
-                  <a:srgbClr val="2B2B2B"/>
-                </a:solidFill>
-                <a:latin typeface="Calibri"/>
-              </a:rPr>
-              <a:t>: es el insumo con el que empezaremos.</a:t>
+              <a:t>paradigma, enfoque, alcance y diseño</a:t>
+            </a:r>
+            <a:r>
+              <a:rPr sz="1600" b="0" i="0">
+                <a:solidFill>
+                  <a:srgbClr val="2B2B2B"/>
+                </a:solidFill>
+                <a:latin typeface="Calibri"/>
+              </a:rPr>
+              <a:t> por separado, sin mezclarlos en una sola frase.</a:t>
             </a:r>
           </a:p>
           <a:p>
@@ -7634,7 +7550,211 @@
                 </a:solidFill>
                 <a:latin typeface="Calibri"/>
               </a:rPr>
-              <a:t>–   Las tutorías por equipo se acuerdan durante la semana con el Docente; no hay atención sin cita previa.</a:t>
+              <a:t>–   Mi justificación del enfoque </a:t>
+            </a:r>
+            <a:r>
+              <a:rPr sz="1600" b="1" i="0">
+                <a:solidFill>
+                  <a:srgbClr val="2B2B2B"/>
+                </a:solidFill>
+                <a:latin typeface="Calibri"/>
+              </a:rPr>
+              <a:t>cita el verbo de mi pregunta</a:t>
+            </a:r>
+            <a:r>
+              <a:rPr sz="1600" b="0" i="0">
+                <a:solidFill>
+                  <a:srgbClr val="2B2B2B"/>
+                </a:solidFill>
+                <a:latin typeface="Calibri"/>
+              </a:rPr>
+              <a:t>, no dice "porque es el más adecuado".</a:t>
+            </a:r>
+          </a:p>
+          <a:p>
+            <a:pPr>
+              <a:spcAft>
+                <a:spcPts val="1000"/>
+              </a:spcAft>
+            </a:pPr>
+            <a:r>
+              <a:rPr sz="1600" b="0" i="0">
+                <a:solidFill>
+                  <a:srgbClr val="2B2B2B"/>
+                </a:solidFill>
+                <a:latin typeface="Calibri"/>
+              </a:rPr>
+              <a:t>–   No confundo enfoque con alcance: escribí, por ejemplo, "cuantitativo, de alcance descriptivo".</a:t>
+            </a:r>
+          </a:p>
+          <a:p>
+            <a:pPr>
+              <a:spcAft>
+                <a:spcPts val="1000"/>
+              </a:spcAft>
+            </a:pPr>
+            <a:r>
+              <a:rPr sz="1600" b="0" i="0">
+                <a:solidFill>
+                  <a:srgbClr val="2B2B2B"/>
+                </a:solidFill>
+                <a:latin typeface="Calibri"/>
+              </a:rPr>
+              <a:t>–   Si escribí </a:t>
+            </a:r>
+            <a:r>
+              <a:rPr sz="1600" b="1" i="0">
+                <a:solidFill>
+                  <a:srgbClr val="2B2B2B"/>
+                </a:solidFill>
+                <a:latin typeface="Calibri"/>
+              </a:rPr>
+              <a:t>mixto</a:t>
+            </a:r>
+            <a:r>
+              <a:rPr sz="1600" b="0" i="0">
+                <a:solidFill>
+                  <a:srgbClr val="2B2B2B"/>
+                </a:solidFill>
+                <a:latin typeface="Calibri"/>
+              </a:rPr>
+              <a:t>, expliqué qué parte de la pregunta no responde cada ruta por separado.</a:t>
+            </a:r>
+          </a:p>
+          <a:p>
+            <a:pPr>
+              <a:spcAft>
+                <a:spcPts val="1000"/>
+              </a:spcAft>
+            </a:pPr>
+            <a:r>
+              <a:rPr sz="1600" b="0" i="0">
+                <a:solidFill>
+                  <a:srgbClr val="2B2B2B"/>
+                </a:solidFill>
+                <a:latin typeface="Calibri"/>
+              </a:rPr>
+              <a:t>–   Elegí </a:t>
+            </a:r>
+            <a:r>
+              <a:rPr sz="1600" b="1" i="0">
+                <a:solidFill>
+                  <a:srgbClr val="2B2B2B"/>
+                </a:solidFill>
+                <a:latin typeface="Calibri"/>
+              </a:rPr>
+              <a:t>un solo diseño</a:t>
+            </a:r>
+            <a:r>
+              <a:rPr sz="1600" b="0" i="0">
+                <a:solidFill>
+                  <a:srgbClr val="2B2B2B"/>
+                </a:solidFill>
+                <a:latin typeface="Calibri"/>
+              </a:rPr>
+              <a:t> y lo describí en términos operativos, no como lista de opciones.</a:t>
+            </a:r>
+          </a:p>
+          <a:p>
+            <a:pPr>
+              <a:spcAft>
+                <a:spcPts val="1000"/>
+              </a:spcAft>
+            </a:pPr>
+            <a:r>
+              <a:rPr sz="1600" b="0" i="0">
+                <a:solidFill>
+                  <a:srgbClr val="2B2B2B"/>
+                </a:solidFill>
+                <a:latin typeface="Calibri"/>
+              </a:rPr>
+              <a:t>–   Todos los verbos del capítulo están en </a:t>
+            </a:r>
+            <a:r>
+              <a:rPr sz="1600" b="1" i="0">
+                <a:solidFill>
+                  <a:srgbClr val="2B2B2B"/>
+                </a:solidFill>
+                <a:latin typeface="Calibri"/>
+              </a:rPr>
+              <a:t>condicional o futuro</a:t>
+            </a:r>
+            <a:r>
+              <a:rPr sz="1600" b="0" i="0">
+                <a:solidFill>
+                  <a:srgbClr val="2B2B2B"/>
+                </a:solidFill>
+                <a:latin typeface="Calibri"/>
+              </a:rPr>
+              <a:t>: nada aparece como ya ejecutado.</a:t>
+            </a:r>
+          </a:p>
+          <a:p>
+            <a:pPr>
+              <a:spcAft>
+                <a:spcPts val="1000"/>
+              </a:spcAft>
+            </a:pPr>
+            <a:r>
+              <a:rPr sz="1600" b="0" i="0">
+                <a:solidFill>
+                  <a:srgbClr val="2B2B2B"/>
+                </a:solidFill>
+                <a:latin typeface="Calibri"/>
+              </a:rPr>
+              <a:t>–   Mis </a:t>
+            </a:r>
+            <a:r>
+              <a:rPr sz="1600" b="1" i="0">
+                <a:solidFill>
+                  <a:srgbClr val="2B2B2B"/>
+                </a:solidFill>
+                <a:latin typeface="Calibri"/>
+              </a:rPr>
+              <a:t>objetivos específicos</a:t>
+            </a:r>
+            <a:r>
+              <a:rPr sz="1600" b="0" i="0">
+                <a:solidFill>
+                  <a:srgbClr val="2B2B2B"/>
+                </a:solidFill>
+                <a:latin typeface="Calibri"/>
+              </a:rPr>
+              <a:t> siguen alineados con la ruta que acabo de elegir.</a:t>
+            </a:r>
+          </a:p>
+          <a:p>
+            <a:pPr>
+              <a:spcAft>
+                <a:spcPts val="1000"/>
+              </a:spcAft>
+            </a:pPr>
+            <a:r>
+              <a:rPr sz="1600" b="0" i="0">
+                <a:solidFill>
+                  <a:srgbClr val="2B2B2B"/>
+                </a:solidFill>
+                <a:latin typeface="Calibri"/>
+              </a:rPr>
+              <a:t>–   Respaldé la elección metodológica con </a:t>
+            </a:r>
+            <a:r>
+              <a:rPr sz="1600" b="1" i="0">
+                <a:solidFill>
+                  <a:srgbClr val="2B2B2B"/>
+                </a:solidFill>
+                <a:latin typeface="Calibri"/>
+              </a:rPr>
+              <a:t>al menos una cita</a:t>
+            </a:r>
+            <a:r>
+              <a:rPr sz="1600" b="0" i="0">
+                <a:solidFill>
+                  <a:srgbClr val="2B2B2B"/>
+                </a:solidFill>
+                <a:latin typeface="Calibri"/>
+              </a:rPr>
+              <a:t> al texto guía, en APA 7.</a:t>
             </a:r>
           </a:p>
         </p:txBody>
@@ -7683,6 +7803,1885 @@
 </file>
 
 <file path=ppt/slides/slide18.xml><?xml version="1.0" encoding="utf-8"?>
+<p:sld xmlns:a="http://schemas.openxmlformats.org/drawingml/2006/main" xmlns:p="http://schemas.openxmlformats.org/presentationml/2006/main" xmlns:r="http://schemas.openxmlformats.org/officeDocument/2006/relationships">
+  <p:cSld>
+    <p:bg>
+      <p:bgPr>
+        <a:solidFill>
+          <a:srgbClr val="FFFFFF"/>
+        </a:solidFill>
+        <a:effectLst/>
+      </p:bgPr>
+    </p:bg>
+    <p:spTree>
+      <p:nvGrpSpPr>
+        <p:cNvPr id="1" name=""/>
+        <p:cNvGrpSpPr/>
+        <p:nvPr/>
+      </p:nvGrpSpPr>
+      <p:grpSpPr/>
+      <p:sp>
+        <p:nvSpPr>
+          <p:cNvPr id="2" name="Rectangle 1"/>
+          <p:cNvSpPr/>
+          <p:nvPr/>
+        </p:nvSpPr>
+        <p:spPr>
+          <a:xfrm>
+            <a:off x="0" y="0"/>
+            <a:ext cx="12191695" cy="1188720"/>
+          </a:xfrm>
+          <a:prstGeom prst="rect">
+            <a:avLst/>
+          </a:prstGeom>
+          <a:solidFill>
+            <a:srgbClr val="0C2340"/>
+          </a:solidFill>
+          <a:ln>
+            <a:noFill/>
+          </a:ln>
+          <a:effectLst/>
+        </p:spPr>
+        <p:style>
+          <a:lnRef idx="1">
+            <a:schemeClr val="accent1"/>
+          </a:lnRef>
+          <a:fillRef idx="3">
+            <a:schemeClr val="accent1"/>
+          </a:fillRef>
+          <a:effectRef idx="2">
+            <a:schemeClr val="accent1"/>
+          </a:effectRef>
+          <a:fontRef idx="minor">
+            <a:schemeClr val="lt1"/>
+          </a:fontRef>
+        </p:style>
+        <p:txBody>
+          <a:bodyPr rtlCol="0" anchor="ctr"/>
+          <a:lstStyle/>
+          <a:p>
+            <a:pPr algn="ctr"/>
+          </a:p>
+        </p:txBody>
+      </p:sp>
+      <p:sp>
+        <p:nvSpPr>
+          <p:cNvPr id="3" name="TextBox 2"/>
+          <p:cNvSpPr txBox="1"/>
+          <p:nvPr/>
+        </p:nvSpPr>
+        <p:spPr>
+          <a:xfrm>
+            <a:off x="640080" y="0"/>
+            <a:ext cx="9082735" cy="1188720"/>
+          </a:xfrm>
+          <a:prstGeom prst="rect">
+            <a:avLst/>
+          </a:prstGeom>
+          <a:noFill/>
+        </p:spPr>
+        <p:txBody>
+          <a:bodyPr wrap="square" anchor="ctr" lIns="0" rIns="0" tIns="0" bIns="0">
+            <a:spAutoFit/>
+          </a:bodyPr>
+          <a:lstStyle/>
+          <a:p>
+            <a:pPr algn="ctr"/>
+            <a:r>
+              <a:rPr sz="2600" b="1" i="0">
+                <a:solidFill>
+                  <a:srgbClr val="FFFFFF"/>
+                </a:solidFill>
+                <a:latin typeface="Calibri"/>
+              </a:rPr>
+              <a:t>Trabajo autónomo y qué viene después</a:t>
+            </a:r>
+          </a:p>
+        </p:txBody>
+      </p:sp>
+      <p:sp>
+        <p:nvSpPr>
+          <p:cNvPr id="4" name="TextBox 3"/>
+          <p:cNvSpPr txBox="1"/>
+          <p:nvPr/>
+        </p:nvSpPr>
+        <p:spPr>
+          <a:xfrm>
+            <a:off x="640080" y="1691639"/>
+            <a:ext cx="10911535" cy="4617720"/>
+          </a:xfrm>
+          <a:prstGeom prst="rect">
+            <a:avLst/>
+          </a:prstGeom>
+          <a:noFill/>
+        </p:spPr>
+        <p:txBody>
+          <a:bodyPr wrap="square" anchor="t" lIns="0" rIns="0" tIns="0" bIns="0">
+            <a:spAutoFit/>
+          </a:bodyPr>
+          <a:lstStyle/>
+          <a:p>
+            <a:pPr>
+              <a:spcAft>
+                <a:spcPts val="1000"/>
+              </a:spcAft>
+            </a:pPr>
+            <a:r>
+              <a:rPr sz="1600" b="0" i="0">
+                <a:solidFill>
+                  <a:srgbClr val="2B2B2B"/>
+                </a:solidFill>
+                <a:latin typeface="Calibri"/>
+              </a:rPr>
+              <a:t>–   </a:t>
+            </a:r>
+            <a:r>
+              <a:rPr sz="1600" b="1" i="0">
+                <a:solidFill>
+                  <a:srgbClr val="2B2B2B"/>
+                </a:solidFill>
+                <a:latin typeface="Calibri"/>
+              </a:rPr>
+              <a:t>Autónomo de esta semana:</a:t>
+            </a:r>
+          </a:p>
+          <a:p>
+            <a:pPr lvl="1">
+              <a:spcAft>
+                <a:spcPts val="600"/>
+              </a:spcAft>
+            </a:pPr>
+            <a:r>
+              <a:rPr sz="1500" b="0" i="0">
+                <a:solidFill>
+                  <a:srgbClr val="2B2B2B"/>
+                </a:solidFill>
+                <a:latin typeface="Calibri"/>
+              </a:rPr>
+              <a:t>●   Convierta la fila de su matriz en </a:t>
+            </a:r>
+            <a:r>
+              <a:rPr sz="1500" b="1" i="0">
+                <a:solidFill>
+                  <a:srgbClr val="2B2B2B"/>
+                </a:solidFill>
+                <a:latin typeface="Calibri"/>
+              </a:rPr>
+              <a:t>prosa</a:t>
+            </a:r>
+            <a:r>
+              <a:rPr sz="1500" b="0" i="0">
+                <a:solidFill>
+                  <a:srgbClr val="2B2B2B"/>
+                </a:solidFill>
+                <a:latin typeface="Calibri"/>
+              </a:rPr>
+              <a:t>: el capítulo metodológico se entrega redactado, la tabla es su borrador de control.</a:t>
+            </a:r>
+          </a:p>
+          <a:p>
+            <a:pPr lvl="1">
+              <a:spcAft>
+                <a:spcPts val="600"/>
+              </a:spcAft>
+            </a:pPr>
+            <a:r>
+              <a:rPr sz="1500" b="0" i="0">
+                <a:solidFill>
+                  <a:srgbClr val="2B2B2B"/>
+                </a:solidFill>
+                <a:latin typeface="Calibri"/>
+              </a:rPr>
+              <a:t>●   Revise si algún </a:t>
+            </a:r>
+            <a:r>
+              <a:rPr sz="1500" b="1" i="0">
+                <a:solidFill>
+                  <a:srgbClr val="2B2B2B"/>
+                </a:solidFill>
+                <a:latin typeface="Calibri"/>
+              </a:rPr>
+              <a:t>objetivo específico</a:t>
+            </a:r>
+            <a:r>
+              <a:rPr sz="1500" b="0" i="0">
+                <a:solidFill>
+                  <a:srgbClr val="2B2B2B"/>
+                </a:solidFill>
+                <a:latin typeface="Calibri"/>
+              </a:rPr>
+              <a:t> quedó huérfano de método; si lo hay, o se ajusta el objetivo o se amplía la técnica.</a:t>
+            </a:r>
+          </a:p>
+          <a:p>
+            <a:pPr lvl="1">
+              <a:spcAft>
+                <a:spcPts val="600"/>
+              </a:spcAft>
+            </a:pPr>
+            <a:r>
+              <a:rPr sz="1500" b="0" i="0">
+                <a:solidFill>
+                  <a:srgbClr val="2B2B2B"/>
+                </a:solidFill>
+                <a:latin typeface="Calibri"/>
+              </a:rPr>
+              <a:t>●   Anote las dudas metodológicas concretas para llevarlas a la tutoría de la semana.</a:t>
+            </a:r>
+          </a:p>
+          <a:p>
+            <a:pPr>
+              <a:spcAft>
+                <a:spcPts val="1000"/>
+              </a:spcAft>
+            </a:pPr>
+            <a:r>
+              <a:rPr sz="1600" b="0" i="0">
+                <a:solidFill>
+                  <a:srgbClr val="2B2B2B"/>
+                </a:solidFill>
+                <a:latin typeface="Calibri"/>
+              </a:rPr>
+              <a:t>–   </a:t>
+            </a:r>
+            <a:r>
+              <a:rPr sz="1600" b="1" i="0">
+                <a:solidFill>
+                  <a:srgbClr val="2B2B2B"/>
+                </a:solidFill>
+                <a:latin typeface="Calibri"/>
+              </a:rPr>
+              <a:t>En la próxima sesión aterrizamos el método a personas y herramientas:</a:t>
+            </a:r>
+          </a:p>
+          <a:p>
+            <a:pPr lvl="1">
+              <a:spcAft>
+                <a:spcPts val="600"/>
+              </a:spcAft>
+            </a:pPr>
+            <a:r>
+              <a:rPr sz="1500" b="0" i="0">
+                <a:solidFill>
+                  <a:srgbClr val="2B2B2B"/>
+                </a:solidFill>
+                <a:latin typeface="Calibri"/>
+              </a:rPr>
+              <a:t>●   </a:t>
+            </a:r>
+            <a:r>
+              <a:rPr sz="1500" b="1" i="0">
+                <a:solidFill>
+                  <a:srgbClr val="2B2B2B"/>
+                </a:solidFill>
+                <a:latin typeface="Calibri"/>
+              </a:rPr>
+              <a:t>Población y muestra</a:t>
+            </a:r>
+            <a:r>
+              <a:rPr sz="1500" b="0" i="0">
+                <a:solidFill>
+                  <a:srgbClr val="2B2B2B"/>
+                </a:solidFill>
+                <a:latin typeface="Calibri"/>
+              </a:rPr>
+              <a:t> propuestas, con criterios de inclusión y exclusión.</a:t>
+            </a:r>
+          </a:p>
+          <a:p>
+            <a:pPr lvl="1">
+              <a:spcAft>
+                <a:spcPts val="600"/>
+              </a:spcAft>
+            </a:pPr>
+            <a:r>
+              <a:rPr sz="1500" b="0" i="0">
+                <a:solidFill>
+                  <a:srgbClr val="2B2B2B"/>
+                </a:solidFill>
+                <a:latin typeface="Calibri"/>
+              </a:rPr>
+              <a:t>●   </a:t>
+            </a:r>
+            <a:r>
+              <a:rPr sz="1500" b="1" i="0">
+                <a:solidFill>
+                  <a:srgbClr val="2B2B2B"/>
+                </a:solidFill>
+                <a:latin typeface="Calibri"/>
+              </a:rPr>
+              <a:t>Técnicas e instrumentos</a:t>
+            </a:r>
+            <a:r>
+              <a:rPr sz="1500" b="0" i="0">
+                <a:solidFill>
+                  <a:srgbClr val="2B2B2B"/>
+                </a:solidFill>
+                <a:latin typeface="Calibri"/>
+              </a:rPr>
+              <a:t> — que en Proyecto I se </a:t>
+            </a:r>
+            <a:r>
+              <a:rPr sz="1500" b="1" i="0">
+                <a:solidFill>
+                  <a:srgbClr val="2B2B2B"/>
+                </a:solidFill>
+                <a:latin typeface="Calibri"/>
+              </a:rPr>
+              <a:t>bosquejan y proponen</a:t>
+            </a:r>
+            <a:r>
+              <a:rPr sz="1500" b="0" i="0">
+                <a:solidFill>
+                  <a:srgbClr val="2B2B2B"/>
+                </a:solidFill>
+                <a:latin typeface="Calibri"/>
+              </a:rPr>
+              <a:t>, nunca se aplican.</a:t>
+            </a:r>
+          </a:p>
+          <a:p>
+            <a:pPr lvl="1">
+              <a:spcAft>
+                <a:spcPts val="600"/>
+              </a:spcAft>
+            </a:pPr>
+            <a:r>
+              <a:rPr sz="1500" b="0" i="0">
+                <a:solidFill>
+                  <a:srgbClr val="2B2B2B"/>
+                </a:solidFill>
+                <a:latin typeface="Calibri"/>
+              </a:rPr>
+              <a:t>●   Traiga decidida su </a:t>
+            </a:r>
+            <a:r>
+              <a:rPr sz="1500" b="1" i="0">
+                <a:solidFill>
+                  <a:srgbClr val="2B2B2B"/>
+                </a:solidFill>
+                <a:latin typeface="Calibri"/>
+              </a:rPr>
+              <a:t>técnica tentativa</a:t>
+            </a:r>
+            <a:r>
+              <a:rPr sz="1500" b="0" i="0">
+                <a:solidFill>
+                  <a:srgbClr val="2B2B2B"/>
+                </a:solidFill>
+                <a:latin typeface="Calibri"/>
+              </a:rPr>
+              <a:t>: es el insumo con el que empezaremos.</a:t>
+            </a:r>
+          </a:p>
+          <a:p>
+            <a:pPr>
+              <a:spcAft>
+                <a:spcPts val="1000"/>
+              </a:spcAft>
+            </a:pPr>
+            <a:r>
+              <a:rPr sz="1600" b="0" i="0">
+                <a:solidFill>
+                  <a:srgbClr val="2B2B2B"/>
+                </a:solidFill>
+                <a:latin typeface="Calibri"/>
+              </a:rPr>
+              <a:t>–   Las tutorías por equipo se acuerdan durante la semana con el Docente; no hay atención sin cita previa.</a:t>
+            </a:r>
+          </a:p>
+        </p:txBody>
+      </p:sp>
+      <p:sp>
+        <p:nvSpPr>
+          <p:cNvPr id="5" name="TextBox 4"/>
+          <p:cNvSpPr txBox="1"/>
+          <p:nvPr/>
+        </p:nvSpPr>
+        <p:spPr>
+          <a:xfrm>
+            <a:off x="11094415" y="6446520"/>
+            <a:ext cx="548640" cy="274320"/>
+          </a:xfrm>
+          <a:prstGeom prst="rect">
+            <a:avLst/>
+          </a:prstGeom>
+          <a:noFill/>
+        </p:spPr>
+        <p:txBody>
+          <a:bodyPr wrap="square" anchor="t" lIns="0" rIns="0" tIns="0" bIns="0">
+            <a:spAutoFit/>
+          </a:bodyPr>
+          <a:lstStyle/>
+          <a:p>
+            <a:pPr algn="r"/>
+            <a:r>
+              <a:rPr sz="1000" b="1" i="0">
+                <a:solidFill>
+                  <a:srgbClr val="8F989D"/>
+                </a:solidFill>
+                <a:latin typeface="Calibri"/>
+              </a:rPr>
+              <a:t>18</a:t>
+            </a:r>
+          </a:p>
+        </p:txBody>
+      </p:sp>
+    </p:spTree>
+  </p:cSld>
+  <p:clrMapOvr>
+    <a:masterClrMapping/>
+  </p:clrMapOvr>
+</p:sld>
+</file>
+
+<file path=ppt/slides/slide19.xml><?xml version="1.0" encoding="utf-8"?>
+<p:sld xmlns:a="http://schemas.openxmlformats.org/drawingml/2006/main" xmlns:p="http://schemas.openxmlformats.org/presentationml/2006/main" xmlns:r="http://schemas.openxmlformats.org/officeDocument/2006/relationships">
+  <p:cSld>
+    <p:bg>
+      <p:bgPr>
+        <a:solidFill>
+          <a:srgbClr val="FFFFFF"/>
+        </a:solidFill>
+        <a:effectLst/>
+      </p:bgPr>
+    </p:bg>
+    <p:spTree>
+      <p:nvGrpSpPr>
+        <p:cNvPr id="1" name=""/>
+        <p:cNvGrpSpPr/>
+        <p:nvPr/>
+      </p:nvGrpSpPr>
+      <p:grpSpPr/>
+      <p:sp>
+        <p:nvSpPr>
+          <p:cNvPr id="2" name="Rectangle 1"/>
+          <p:cNvSpPr/>
+          <p:nvPr/>
+        </p:nvSpPr>
+        <p:spPr>
+          <a:xfrm>
+            <a:off x="0" y="0"/>
+            <a:ext cx="12191695" cy="1188720"/>
+          </a:xfrm>
+          <a:prstGeom prst="rect">
+            <a:avLst/>
+          </a:prstGeom>
+          <a:solidFill>
+            <a:srgbClr val="0C2340"/>
+          </a:solidFill>
+          <a:ln>
+            <a:noFill/>
+          </a:ln>
+          <a:effectLst/>
+        </p:spPr>
+        <p:style>
+          <a:lnRef idx="1">
+            <a:schemeClr val="accent1"/>
+          </a:lnRef>
+          <a:fillRef idx="3">
+            <a:schemeClr val="accent1"/>
+          </a:fillRef>
+          <a:effectRef idx="2">
+            <a:schemeClr val="accent1"/>
+          </a:effectRef>
+          <a:fontRef idx="minor">
+            <a:schemeClr val="lt1"/>
+          </a:fontRef>
+        </p:style>
+        <p:txBody>
+          <a:bodyPr rtlCol="0" anchor="ctr"/>
+          <a:lstStyle/>
+          <a:p>
+            <a:pPr algn="ctr"/>
+          </a:p>
+        </p:txBody>
+      </p:sp>
+      <p:sp>
+        <p:nvSpPr>
+          <p:cNvPr id="3" name="TextBox 2"/>
+          <p:cNvSpPr txBox="1"/>
+          <p:nvPr/>
+        </p:nvSpPr>
+        <p:spPr>
+          <a:xfrm>
+            <a:off x="640080" y="0"/>
+            <a:ext cx="9082735" cy="1188720"/>
+          </a:xfrm>
+          <a:prstGeom prst="rect">
+            <a:avLst/>
+          </a:prstGeom>
+          <a:noFill/>
+        </p:spPr>
+        <p:txBody>
+          <a:bodyPr wrap="square" anchor="ctr" lIns="0" rIns="0" tIns="0" bIns="0">
+            <a:spAutoFit/>
+          </a:bodyPr>
+          <a:lstStyle/>
+          <a:p>
+            <a:pPr algn="ctr"/>
+            <a:r>
+              <a:rPr sz="2600" b="1" i="0">
+                <a:solidFill>
+                  <a:srgbClr val="FFFFFF"/>
+                </a:solidFill>
+                <a:latin typeface="Calibri"/>
+              </a:rPr>
+              <a:t>RUTA DE ENTREGABLES DEL CURSO</a:t>
+            </a:r>
+          </a:p>
+        </p:txBody>
+      </p:sp>
+      <p:sp>
+        <p:nvSpPr>
+          <p:cNvPr id="4" name="TextBox 3"/>
+          <p:cNvSpPr txBox="1"/>
+          <p:nvPr/>
+        </p:nvSpPr>
+        <p:spPr>
+          <a:xfrm>
+            <a:off x="640080" y="1280160"/>
+            <a:ext cx="10911535" cy="411480"/>
+          </a:xfrm>
+          <a:prstGeom prst="rect">
+            <a:avLst/>
+          </a:prstGeom>
+          <a:noFill/>
+        </p:spPr>
+        <p:txBody>
+          <a:bodyPr wrap="square" anchor="t" lIns="0" rIns="0" tIns="0" bIns="0">
+            <a:spAutoFit/>
+          </a:bodyPr>
+          <a:lstStyle/>
+          <a:p>
+            <a:pPr algn="ctr"/>
+            <a:r>
+              <a:rPr sz="1500" b="0" i="0">
+                <a:solidFill>
+                  <a:srgbClr val="2B2B2B"/>
+                </a:solidFill>
+                <a:latin typeface="Calibri"/>
+              </a:rPr>
+              <a:t>Sin fechas a propósito: aquí va </a:t>
+            </a:r>
+            <a:r>
+              <a:rPr sz="1500" b="1" i="0">
+                <a:solidFill>
+                  <a:srgbClr val="2B2B2B"/>
+                </a:solidFill>
+                <a:latin typeface="Calibri"/>
+              </a:rPr>
+              <a:t>en qué punto del curso</a:t>
+            </a:r>
+            <a:r>
+              <a:rPr sz="1500" b="0" i="0">
+                <a:solidFill>
+                  <a:srgbClr val="2B2B2B"/>
+                </a:solidFill>
+                <a:latin typeface="Calibri"/>
+              </a:rPr>
+              <a:t> cierra cada ítem · la ventana exacta la fija CDigital</a:t>
+            </a:r>
+          </a:p>
+        </p:txBody>
+      </p:sp>
+      <p:graphicFrame>
+        <p:nvGraphicFramePr>
+          <p:cNvPr id="5" name="Table 4"/>
+          <p:cNvGraphicFramePr>
+            <a:graphicFrameLocks noGrp="1"/>
+          </p:cNvGraphicFramePr>
+          <p:nvPr/>
+        </p:nvGraphicFramePr>
+        <p:xfrm>
+          <a:off x="640080" y="2011679"/>
+          <a:ext cx="10911533" cy="3017520"/>
+        </p:xfrm>
+        <a:graphic>
+          <a:graphicData uri="http://schemas.openxmlformats.org/drawingml/2006/table">
+            <a:tbl>
+              <a:tblPr>
+                <a:tableStyleId>{2D5ABB26-0587-4C30-8999-92F81FD0307C}</a:tableStyleId>
+              </a:tblPr>
+              <a:tblGrid>
+                <a:gridCol w="2659113"/>
+                <a:gridCol w="2659113"/>
+                <a:gridCol w="5593307"/>
+              </a:tblGrid>
+              <a:tr h="502920">
+                <a:tc>
+                  <a:txBody>
+                    <a:bodyPr/>
+                    <a:lstStyle/>
+                    <a:p>
+                      <a:pPr algn="l"/>
+                      <a:r>
+                        <a:rPr sz="1300" b="1" i="0">
+                          <a:solidFill>
+                            <a:srgbClr val="FFFFFF"/>
+                          </a:solidFill>
+                          <a:latin typeface="Calibri"/>
+                        </a:rPr>
+                        <a:t>Cierra en la semana de…</a:t>
+                      </a:r>
+                    </a:p>
+                  </a:txBody>
+                  <a:tcPr anchor="ctr" marL="109728" marR="91440" marT="36576" marB="36576">
+                    <a:solidFill>
+                      <a:srgbClr val="0C2340"/>
+                    </a:solidFill>
+                  </a:tcPr>
+                </a:tc>
+                <a:tc>
+                  <a:txBody>
+                    <a:bodyPr/>
+                    <a:lstStyle/>
+                    <a:p>
+                      <a:pPr algn="l"/>
+                      <a:r>
+                        <a:rPr sz="1300" b="1" i="0">
+                          <a:solidFill>
+                            <a:srgbClr val="FFFFFF"/>
+                          </a:solidFill>
+                          <a:latin typeface="Calibri"/>
+                        </a:rPr>
+                        <a:t>Entregable</a:t>
+                      </a:r>
+                    </a:p>
+                  </a:txBody>
+                  <a:tcPr anchor="ctr" marL="109728" marR="91440" marT="36576" marB="36576">
+                    <a:solidFill>
+                      <a:srgbClr val="0C2340"/>
+                    </a:solidFill>
+                  </a:tcPr>
+                </a:tc>
+                <a:tc>
+                  <a:txBody>
+                    <a:bodyPr/>
+                    <a:lstStyle/>
+                    <a:p>
+                      <a:pPr algn="l"/>
+                      <a:r>
+                        <a:rPr sz="1300" b="1" i="0">
+                          <a:solidFill>
+                            <a:srgbClr val="FFFFFF"/>
+                          </a:solidFill>
+                          <a:latin typeface="Calibri"/>
+                        </a:rPr>
+                        <a:t>Qué debes tener listo</a:t>
+                      </a:r>
+                    </a:p>
+                  </a:txBody>
+                  <a:tcPr anchor="ctr" marL="109728" marR="91440" marT="36576" marB="36576">
+                    <a:solidFill>
+                      <a:srgbClr val="0C2340"/>
+                    </a:solidFill>
+                  </a:tcPr>
+                </a:tc>
+              </a:tr>
+              <a:tr h="502920">
+                <a:tc>
+                  <a:txBody>
+                    <a:bodyPr/>
+                    <a:lstStyle/>
+                    <a:p>
+                      <a:pPr algn="l"/>
+                      <a:r>
+                        <a:rPr sz="1100" b="1" i="0">
+                          <a:solidFill>
+                            <a:srgbClr val="2B2B2B"/>
+                          </a:solidFill>
+                          <a:latin typeface="Calibri"/>
+                        </a:rPr>
+                        <a:t>Sesión 02</a:t>
+                      </a:r>
+                      <a:r>
+                        <a:rPr sz="1100" b="0" i="0">
+                          <a:solidFill>
+                            <a:srgbClr val="2B2B2B"/>
+                          </a:solidFill>
+                          <a:latin typeface="Calibri"/>
+                        </a:rPr>
+                        <a:t> · ya cerró</a:t>
+                      </a:r>
+                    </a:p>
+                  </a:txBody>
+                  <a:tcPr anchor="ctr" marL="109728" marR="91440" marT="36576" marB="36576">
+                    <a:solidFill>
+                      <a:srgbClr val="FFFFFF"/>
+                    </a:solidFill>
+                  </a:tcPr>
+                </a:tc>
+                <a:tc>
+                  <a:txBody>
+                    <a:bodyPr/>
+                    <a:lstStyle/>
+                    <a:p>
+                      <a:pPr algn="l"/>
+                      <a:r>
+                        <a:rPr sz="1100" b="1" i="0">
+                          <a:solidFill>
+                            <a:srgbClr val="2B2B2B"/>
+                          </a:solidFill>
+                          <a:latin typeface="Calibri"/>
+                        </a:rPr>
+                        <a:t>Quiz</a:t>
+                      </a:r>
+                      <a:r>
+                        <a:rPr sz="1100" b="0" i="0">
+                          <a:solidFill>
+                            <a:srgbClr val="2B2B2B"/>
+                          </a:solidFill>
+                          <a:latin typeface="Calibri"/>
+                        </a:rPr>
+                        <a:t> · Cuestionario · 25%</a:t>
+                      </a:r>
+                    </a:p>
+                  </a:txBody>
+                  <a:tcPr anchor="ctr" marL="109728" marR="91440" marT="36576" marB="36576">
+                    <a:solidFill>
+                      <a:srgbClr val="FFFFFF"/>
+                    </a:solidFill>
+                  </a:tcPr>
+                </a:tc>
+                <a:tc>
+                  <a:txBody>
+                    <a:bodyPr/>
+                    <a:lstStyle/>
+                    <a:p>
+                      <a:pPr algn="l"/>
+                      <a:r>
+                        <a:rPr sz="1100" b="0" i="0">
+                          <a:solidFill>
+                            <a:srgbClr val="2B2B2B"/>
+                          </a:solidFill>
+                          <a:latin typeface="Calibri"/>
+                        </a:rPr>
+                        <a:t>Estudia </a:t>
+                      </a:r>
+                      <a:r>
+                        <a:rPr sz="1100" b="1" i="0">
+                          <a:solidFill>
+                            <a:srgbClr val="2B2B2B"/>
+                          </a:solidFill>
+                          <a:latin typeface="Calibri"/>
+                        </a:rPr>
+                        <a:t>problema y pregunta</a:t>
+                      </a:r>
+                      <a:r>
+                        <a:rPr sz="1100" b="0" i="0">
+                          <a:solidFill>
+                            <a:srgbClr val="2B2B2B"/>
+                          </a:solidFill>
+                          <a:latin typeface="Calibri"/>
+                        </a:rPr>
+                        <a:t> de investigación; resuélvelo dentro de su ventana.</a:t>
+                      </a:r>
+                    </a:p>
+                  </a:txBody>
+                  <a:tcPr anchor="ctr" marL="109728" marR="91440" marT="36576" marB="36576">
+                    <a:solidFill>
+                      <a:srgbClr val="FFFFFF"/>
+                    </a:solidFill>
+                  </a:tcPr>
+                </a:tc>
+              </a:tr>
+              <a:tr h="502920">
+                <a:tc>
+                  <a:txBody>
+                    <a:bodyPr/>
+                    <a:lstStyle/>
+                    <a:p>
+                      <a:pPr algn="l"/>
+                      <a:r>
+                        <a:rPr sz="1100" b="1" i="0">
+                          <a:solidFill>
+                            <a:srgbClr val="2B2B2B"/>
+                          </a:solidFill>
+                          <a:latin typeface="Calibri"/>
+                        </a:rPr>
+                        <a:t>Sesión 07</a:t>
+                      </a:r>
+                      <a:r>
+                        <a:rPr sz="1100" b="0" i="0">
+                          <a:solidFill>
+                            <a:srgbClr val="2B2B2B"/>
+                          </a:solidFill>
+                          <a:latin typeface="Calibri"/>
+                        </a:rPr>
+                        <a:t> · ya cerró</a:t>
+                      </a:r>
+                    </a:p>
+                  </a:txBody>
+                  <a:tcPr anchor="ctr" marL="109728" marR="91440" marT="36576" marB="36576">
+                    <a:solidFill>
+                      <a:srgbClr val="F2F2F2"/>
+                    </a:solidFill>
+                  </a:tcPr>
+                </a:tc>
+                <a:tc>
+                  <a:txBody>
+                    <a:bodyPr/>
+                    <a:lstStyle/>
+                    <a:p>
+                      <a:pPr algn="l"/>
+                      <a:r>
+                        <a:rPr sz="1100" b="1" i="0">
+                          <a:solidFill>
+                            <a:srgbClr val="2B2B2B"/>
+                          </a:solidFill>
+                          <a:latin typeface="Calibri"/>
+                        </a:rPr>
+                        <a:t>ACA 1</a:t>
+                      </a:r>
+                      <a:r>
+                        <a:rPr sz="1100" b="0" i="0">
+                          <a:solidFill>
+                            <a:srgbClr val="2B2B2B"/>
+                          </a:solidFill>
+                          <a:latin typeface="Calibri"/>
+                        </a:rPr>
+                        <a:t> · Tarea · 25%</a:t>
+                      </a:r>
+                    </a:p>
+                  </a:txBody>
+                  <a:tcPr anchor="ctr" marL="109728" marR="91440" marT="36576" marB="36576">
+                    <a:solidFill>
+                      <a:srgbClr val="F2F2F2"/>
+                    </a:solidFill>
+                  </a:tcPr>
+                </a:tc>
+                <a:tc>
+                  <a:txBody>
+                    <a:bodyPr/>
+                    <a:lstStyle/>
+                    <a:p>
+                      <a:pPr algn="l"/>
+                      <a:r>
+                        <a:rPr sz="1100" b="0" i="0">
+                          <a:solidFill>
+                            <a:srgbClr val="2B2B2B"/>
+                          </a:solidFill>
+                          <a:latin typeface="Calibri"/>
+                        </a:rPr>
+                        <a:t>Sube en </a:t>
+                      </a:r>
+                      <a:r>
+                        <a:rPr sz="1100" b="1" i="0">
+                          <a:solidFill>
+                            <a:srgbClr val="2B2B2B"/>
+                          </a:solidFill>
+                          <a:latin typeface="Calibri"/>
+                        </a:rPr>
+                        <a:t>plantilla APA</a:t>
+                      </a:r>
+                      <a:r>
+                        <a:rPr sz="1100" b="0" i="0">
+                          <a:solidFill>
+                            <a:srgbClr val="2B2B2B"/>
+                          </a:solidFill>
+                          <a:latin typeface="Calibri"/>
+                        </a:rPr>
+                        <a:t> problema, pregunta, objetivos, mínimo 6 antecedentes y los marcos.</a:t>
+                      </a:r>
+                    </a:p>
+                  </a:txBody>
+                  <a:tcPr anchor="ctr" marL="109728" marR="91440" marT="36576" marB="36576">
+                    <a:solidFill>
+                      <a:srgbClr val="F2F2F2"/>
+                    </a:solidFill>
+                  </a:tcPr>
+                </a:tc>
+              </a:tr>
+              <a:tr h="502920">
+                <a:tc>
+                  <a:txBody>
+                    <a:bodyPr/>
+                    <a:lstStyle/>
+                    <a:p>
+                      <a:pPr algn="l"/>
+                      <a:r>
+                        <a:rPr sz="1100" b="1" i="0">
+                          <a:solidFill>
+                            <a:srgbClr val="2B2B2B"/>
+                          </a:solidFill>
+                          <a:latin typeface="Calibri"/>
+                        </a:rPr>
+                        <a:t>Sesión 10</a:t>
+                      </a:r>
+                      <a:r>
+                        <a:rPr sz="1100" b="0" i="0">
+                          <a:solidFill>
+                            <a:srgbClr val="2B2B2B"/>
+                          </a:solidFill>
+                          <a:latin typeface="Calibri"/>
+                        </a:rPr>
+                        <a:t> · pendiente</a:t>
+                      </a:r>
+                    </a:p>
+                  </a:txBody>
+                  <a:tcPr anchor="ctr" marL="109728" marR="91440" marT="36576" marB="36576">
+                    <a:solidFill>
+                      <a:srgbClr val="FFFFFF"/>
+                    </a:solidFill>
+                  </a:tcPr>
+                </a:tc>
+                <a:tc>
+                  <a:txBody>
+                    <a:bodyPr/>
+                    <a:lstStyle/>
+                    <a:p>
+                      <a:pPr algn="l"/>
+                      <a:r>
+                        <a:rPr sz="1100" b="1" i="0">
+                          <a:solidFill>
+                            <a:srgbClr val="2B2B2B"/>
+                          </a:solidFill>
+                          <a:latin typeface="Calibri"/>
+                        </a:rPr>
+                        <a:t>ACA FINAL</a:t>
+                      </a:r>
+                      <a:r>
+                        <a:rPr sz="1100" b="0" i="0">
+                          <a:solidFill>
+                            <a:srgbClr val="2B2B2B"/>
+                          </a:solidFill>
+                          <a:latin typeface="Calibri"/>
+                        </a:rPr>
+                        <a:t> · Tarea · 42%</a:t>
+                      </a:r>
+                    </a:p>
+                  </a:txBody>
+                  <a:tcPr anchor="ctr" marL="109728" marR="91440" marT="36576" marB="36576">
+                    <a:solidFill>
+                      <a:srgbClr val="FFFFFF"/>
+                    </a:solidFill>
+                  </a:tcPr>
+                </a:tc>
+                <a:tc>
+                  <a:txBody>
+                    <a:bodyPr/>
+                    <a:lstStyle/>
+                    <a:p>
+                      <a:pPr algn="l"/>
+                      <a:r>
+                        <a:rPr sz="1100" b="0" i="0">
+                          <a:solidFill>
+                            <a:srgbClr val="2B2B2B"/>
+                          </a:solidFill>
+                          <a:latin typeface="Calibri"/>
+                        </a:rPr>
+                        <a:t>Sube el anteproyecto integrado con las </a:t>
+                      </a:r>
+                      <a:r>
+                        <a:rPr sz="1100" b="1" i="0">
+                          <a:solidFill>
+                            <a:srgbClr val="2B2B2B"/>
+                          </a:solidFill>
+                          <a:latin typeface="Calibri"/>
+                        </a:rPr>
+                        <a:t>correcciones</a:t>
+                      </a:r>
+                      <a:r>
+                        <a:rPr sz="1100" b="0" i="0">
+                          <a:solidFill>
+                            <a:srgbClr val="2B2B2B"/>
+                          </a:solidFill>
+                          <a:latin typeface="Calibri"/>
+                        </a:rPr>
+                        <a:t> de la ACA 1, metodología y viabilidad.</a:t>
+                      </a:r>
+                    </a:p>
+                  </a:txBody>
+                  <a:tcPr anchor="ctr" marL="109728" marR="91440" marT="36576" marB="36576">
+                    <a:solidFill>
+                      <a:srgbClr val="FFFFFF"/>
+                    </a:solidFill>
+                  </a:tcPr>
+                </a:tc>
+              </a:tr>
+              <a:tr h="502920">
+                <a:tc>
+                  <a:txBody>
+                    <a:bodyPr/>
+                    <a:lstStyle/>
+                    <a:p>
+                      <a:pPr algn="l"/>
+                      <a:r>
+                        <a:rPr sz="1100" b="1" i="0">
+                          <a:solidFill>
+                            <a:srgbClr val="2B2B2B"/>
+                          </a:solidFill>
+                          <a:latin typeface="Calibri"/>
+                        </a:rPr>
+                        <a:t>Sesión 11</a:t>
+                      </a:r>
+                      <a:r>
+                        <a:rPr sz="1100" b="0" i="0">
+                          <a:solidFill>
+                            <a:srgbClr val="2B2B2B"/>
+                          </a:solidFill>
+                          <a:latin typeface="Calibri"/>
+                        </a:rPr>
+                        <a:t> · pendiente</a:t>
+                      </a:r>
+                    </a:p>
+                  </a:txBody>
+                  <a:tcPr anchor="ctr" marL="109728" marR="91440" marT="36576" marB="36576">
+                    <a:solidFill>
+                      <a:srgbClr val="F2F2F2"/>
+                    </a:solidFill>
+                  </a:tcPr>
+                </a:tc>
+                <a:tc>
+                  <a:txBody>
+                    <a:bodyPr/>
+                    <a:lstStyle/>
+                    <a:p>
+                      <a:pPr algn="l"/>
+                      <a:r>
+                        <a:rPr sz="1100" b="1" i="0">
+                          <a:solidFill>
+                            <a:srgbClr val="2B2B2B"/>
+                          </a:solidFill>
+                          <a:latin typeface="Calibri"/>
+                        </a:rPr>
+                        <a:t>Autoevaluación</a:t>
+                      </a:r>
+                      <a:r>
+                        <a:rPr sz="1100" b="0" i="0">
+                          <a:solidFill>
+                            <a:srgbClr val="2B2B2B"/>
+                          </a:solidFill>
+                          <a:latin typeface="Calibri"/>
+                        </a:rPr>
+                        <a:t> · Cuestionario · 4%</a:t>
+                      </a:r>
+                    </a:p>
+                  </a:txBody>
+                  <a:tcPr anchor="ctr" marL="109728" marR="91440" marT="36576" marB="36576">
+                    <a:solidFill>
+                      <a:srgbClr val="F2F2F2"/>
+                    </a:solidFill>
+                  </a:tcPr>
+                </a:tc>
+                <a:tc>
+                  <a:txBody>
+                    <a:bodyPr/>
+                    <a:lstStyle/>
+                    <a:p>
+                      <a:pPr algn="l"/>
+                      <a:r>
+                        <a:rPr sz="1100" b="0" i="0">
+                          <a:solidFill>
+                            <a:srgbClr val="2B2B2B"/>
+                          </a:solidFill>
+                          <a:latin typeface="Calibri"/>
+                        </a:rPr>
+                        <a:t>Diligénciala tú, dentro de su ventana, según tu </a:t>
+                      </a:r>
+                      <a:r>
+                        <a:rPr sz="1100" b="1" i="0">
+                          <a:solidFill>
+                            <a:srgbClr val="2B2B2B"/>
+                          </a:solidFill>
+                          <a:latin typeface="Calibri"/>
+                        </a:rPr>
+                        <a:t>participación real</a:t>
+                      </a:r>
+                      <a:r>
+                        <a:rPr sz="1100" b="0" i="0">
+                          <a:solidFill>
+                            <a:srgbClr val="2B2B2B"/>
+                          </a:solidFill>
+                          <a:latin typeface="Calibri"/>
+                        </a:rPr>
+                        <a:t>.</a:t>
+                      </a:r>
+                    </a:p>
+                  </a:txBody>
+                  <a:tcPr anchor="ctr" marL="109728" marR="91440" marT="36576" marB="36576">
+                    <a:solidFill>
+                      <a:srgbClr val="F2F2F2"/>
+                    </a:solidFill>
+                  </a:tcPr>
+                </a:tc>
+              </a:tr>
+              <a:tr h="502920">
+                <a:tc>
+                  <a:txBody>
+                    <a:bodyPr/>
+                    <a:lstStyle/>
+                    <a:p>
+                      <a:pPr algn="l"/>
+                      <a:r>
+                        <a:rPr sz="1100" b="1" i="0">
+                          <a:solidFill>
+                            <a:srgbClr val="2B2B2B"/>
+                          </a:solidFill>
+                          <a:latin typeface="Calibri"/>
+                        </a:rPr>
+                        <a:t>Sesión 11</a:t>
+                      </a:r>
+                      <a:r>
+                        <a:rPr sz="1100" b="0" i="0">
+                          <a:solidFill>
+                            <a:srgbClr val="2B2B2B"/>
+                          </a:solidFill>
+                          <a:latin typeface="Calibri"/>
+                        </a:rPr>
+                        <a:t> · pendiente</a:t>
+                      </a:r>
+                    </a:p>
+                  </a:txBody>
+                  <a:tcPr anchor="ctr" marL="109728" marR="91440" marT="36576" marB="36576">
+                    <a:solidFill>
+                      <a:srgbClr val="FFFFFF"/>
+                    </a:solidFill>
+                  </a:tcPr>
+                </a:tc>
+                <a:tc>
+                  <a:txBody>
+                    <a:bodyPr/>
+                    <a:lstStyle/>
+                    <a:p>
+                      <a:pPr algn="l"/>
+                      <a:r>
+                        <a:rPr sz="1100" b="1" i="0">
+                          <a:solidFill>
+                            <a:srgbClr val="2B2B2B"/>
+                          </a:solidFill>
+                          <a:latin typeface="Calibri"/>
+                        </a:rPr>
+                        <a:t>Coevaluación</a:t>
+                      </a:r>
+                      <a:r>
+                        <a:rPr sz="1100" b="0" i="0">
+                          <a:solidFill>
+                            <a:srgbClr val="2B2B2B"/>
+                          </a:solidFill>
+                          <a:latin typeface="Calibri"/>
+                        </a:rPr>
+                        <a:t> · Foro · 4%</a:t>
+                      </a:r>
+                    </a:p>
+                  </a:txBody>
+                  <a:tcPr anchor="ctr" marL="109728" marR="91440" marT="36576" marB="36576">
+                    <a:solidFill>
+                      <a:srgbClr val="FFFFFF"/>
+                    </a:solidFill>
+                  </a:tcPr>
+                </a:tc>
+                <a:tc>
+                  <a:txBody>
+                    <a:bodyPr/>
+                    <a:lstStyle/>
+                    <a:p>
+                      <a:pPr algn="l"/>
+                      <a:r>
+                        <a:rPr sz="1100" b="1" i="0">
+                          <a:solidFill>
+                            <a:srgbClr val="2B2B2B"/>
+                          </a:solidFill>
+                          <a:latin typeface="Calibri"/>
+                        </a:rPr>
+                        <a:t>Publica</a:t>
+                      </a:r>
+                      <a:r>
+                        <a:rPr sz="1100" b="0" i="0">
+                          <a:solidFill>
+                            <a:srgbClr val="2B2B2B"/>
+                          </a:solidFill>
+                          <a:latin typeface="Calibri"/>
+                        </a:rPr>
+                        <a:t> tu propio aporte y valora hechos del trabajo del equipo, con respeto.</a:t>
+                      </a:r>
+                    </a:p>
+                  </a:txBody>
+                  <a:tcPr anchor="ctr" marL="109728" marR="91440" marT="36576" marB="36576">
+                    <a:solidFill>
+                      <a:srgbClr val="FFFFFF"/>
+                    </a:solidFill>
+                  </a:tcPr>
+                </a:tc>
+              </a:tr>
+            </a:tbl>
+          </a:graphicData>
+        </a:graphic>
+      </p:graphicFrame>
+      <p:sp>
+        <p:nvSpPr>
+          <p:cNvPr id="6" name="TextBox 5"/>
+          <p:cNvSpPr txBox="1"/>
+          <p:nvPr/>
+        </p:nvSpPr>
+        <p:spPr>
+          <a:xfrm>
+            <a:off x="640080" y="5166360"/>
+            <a:ext cx="10911535" cy="548640"/>
+          </a:xfrm>
+          <a:prstGeom prst="rect">
+            <a:avLst/>
+          </a:prstGeom>
+          <a:noFill/>
+        </p:spPr>
+        <p:txBody>
+          <a:bodyPr wrap="square" anchor="t" lIns="0" rIns="0" tIns="0" bIns="0">
+            <a:spAutoFit/>
+          </a:bodyPr>
+          <a:lstStyle/>
+          <a:p>
+            <a:r>
+              <a:rPr sz="1200" b="0" i="1">
+                <a:solidFill>
+                  <a:srgbClr val="2B2B2B"/>
+                </a:solidFill>
+                <a:latin typeface="Calibri"/>
+              </a:rPr>
+              <a:t>Esta misma tabla va al final de todas las sesiones. La </a:t>
+            </a:r>
+            <a:r>
+              <a:rPr sz="1200" b="1" i="1">
+                <a:solidFill>
+                  <a:srgbClr val="2B2B2B"/>
+                </a:solidFill>
+                <a:latin typeface="Calibri"/>
+              </a:rPr>
+              <a:t>fecha</a:t>
+            </a:r>
+            <a:r>
+              <a:rPr sz="1200" b="0" i="1">
+                <a:solidFill>
+                  <a:srgbClr val="2B2B2B"/>
+                </a:solidFill>
+                <a:latin typeface="Calibri"/>
+              </a:rPr>
+              <a:t> de cada ventana está en el enunciado del ítem (`Clases/Recursos/ACAs/`) y en el aula: si el aula y cualquier otro material se contradicen, </a:t>
+            </a:r>
+            <a:r>
+              <a:rPr sz="1200" b="1" i="1">
+                <a:solidFill>
+                  <a:srgbClr val="2B2B2B"/>
+                </a:solidFill>
+                <a:latin typeface="Calibri"/>
+              </a:rPr>
+              <a:t>manda el aula</a:t>
+            </a:r>
+            <a:r>
+              <a:rPr sz="1200" b="0" i="1">
+                <a:solidFill>
+                  <a:srgbClr val="2B2B2B"/>
+                </a:solidFill>
+                <a:latin typeface="Calibri"/>
+              </a:rPr>
+              <a:t>.</a:t>
+            </a:r>
+          </a:p>
+        </p:txBody>
+      </p:sp>
+      <p:sp>
+        <p:nvSpPr>
+          <p:cNvPr id="7" name="TextBox 6"/>
+          <p:cNvSpPr txBox="1"/>
+          <p:nvPr/>
+        </p:nvSpPr>
+        <p:spPr>
+          <a:xfrm>
+            <a:off x="11094415" y="6446520"/>
+            <a:ext cx="548640" cy="274320"/>
+          </a:xfrm>
+          <a:prstGeom prst="rect">
+            <a:avLst/>
+          </a:prstGeom>
+          <a:noFill/>
+        </p:spPr>
+        <p:txBody>
+          <a:bodyPr wrap="square" anchor="t" lIns="0" rIns="0" tIns="0" bIns="0">
+            <a:spAutoFit/>
+          </a:bodyPr>
+          <a:lstStyle/>
+          <a:p>
+            <a:pPr algn="r"/>
+            <a:r>
+              <a:rPr sz="1000" b="1" i="0">
+                <a:solidFill>
+                  <a:srgbClr val="8F989D"/>
+                </a:solidFill>
+                <a:latin typeface="Calibri"/>
+              </a:rPr>
+              <a:t>19</a:t>
+            </a:r>
+          </a:p>
+        </p:txBody>
+      </p:sp>
+    </p:spTree>
+  </p:cSld>
+  <p:clrMapOvr>
+    <a:masterClrMapping/>
+  </p:clrMapOvr>
+</p:sld>
+</file>
+
+<file path=ppt/slides/slide2.xml><?xml version="1.0" encoding="utf-8"?>
+<p:sld xmlns:a="http://schemas.openxmlformats.org/drawingml/2006/main" xmlns:p="http://schemas.openxmlformats.org/presentationml/2006/main" xmlns:r="http://schemas.openxmlformats.org/officeDocument/2006/relationships">
+  <p:cSld>
+    <p:bg>
+      <p:bgPr>
+        <a:solidFill>
+          <a:srgbClr val="FFFFFF"/>
+        </a:solidFill>
+        <a:effectLst/>
+      </p:bgPr>
+    </p:bg>
+    <p:spTree>
+      <p:nvGrpSpPr>
+        <p:cNvPr id="1" name=""/>
+        <p:cNvGrpSpPr/>
+        <p:nvPr/>
+      </p:nvGrpSpPr>
+      <p:grpSpPr/>
+      <p:sp>
+        <p:nvSpPr>
+          <p:cNvPr id="2" name="Rectangle 1"/>
+          <p:cNvSpPr/>
+          <p:nvPr/>
+        </p:nvSpPr>
+        <p:spPr>
+          <a:xfrm>
+            <a:off x="0" y="0"/>
+            <a:ext cx="12191695" cy="1188720"/>
+          </a:xfrm>
+          <a:prstGeom prst="rect">
+            <a:avLst/>
+          </a:prstGeom>
+          <a:solidFill>
+            <a:srgbClr val="0C2340"/>
+          </a:solidFill>
+          <a:ln>
+            <a:noFill/>
+          </a:ln>
+          <a:effectLst/>
+        </p:spPr>
+        <p:style>
+          <a:lnRef idx="1">
+            <a:schemeClr val="accent1"/>
+          </a:lnRef>
+          <a:fillRef idx="3">
+            <a:schemeClr val="accent1"/>
+          </a:fillRef>
+          <a:effectRef idx="2">
+            <a:schemeClr val="accent1"/>
+          </a:effectRef>
+          <a:fontRef idx="minor">
+            <a:schemeClr val="lt1"/>
+          </a:fontRef>
+        </p:style>
+        <p:txBody>
+          <a:bodyPr rtlCol="0" anchor="ctr"/>
+          <a:lstStyle/>
+          <a:p>
+            <a:pPr algn="ctr"/>
+          </a:p>
+        </p:txBody>
+      </p:sp>
+      <p:sp>
+        <p:nvSpPr>
+          <p:cNvPr id="3" name="TextBox 2"/>
+          <p:cNvSpPr txBox="1"/>
+          <p:nvPr/>
+        </p:nvSpPr>
+        <p:spPr>
+          <a:xfrm>
+            <a:off x="640080" y="0"/>
+            <a:ext cx="9082735" cy="1188720"/>
+          </a:xfrm>
+          <a:prstGeom prst="rect">
+            <a:avLst/>
+          </a:prstGeom>
+          <a:noFill/>
+        </p:spPr>
+        <p:txBody>
+          <a:bodyPr wrap="square" anchor="ctr" lIns="0" rIns="0" tIns="0" bIns="0">
+            <a:spAutoFit/>
+          </a:bodyPr>
+          <a:lstStyle/>
+          <a:p>
+            <a:pPr algn="ctr"/>
+            <a:r>
+              <a:rPr sz="2600" b="1" i="0">
+                <a:solidFill>
+                  <a:srgbClr val="FFFFFF"/>
+                </a:solidFill>
+                <a:latin typeface="Calibri"/>
+              </a:rPr>
+              <a:t>Dos preguntas de IA que NO se pueden investigar igual</a:t>
+            </a:r>
+          </a:p>
+        </p:txBody>
+      </p:sp>
+      <p:sp>
+        <p:nvSpPr>
+          <p:cNvPr id="4" name="TextBox 3"/>
+          <p:cNvSpPr txBox="1"/>
+          <p:nvPr/>
+        </p:nvSpPr>
+        <p:spPr>
+          <a:xfrm>
+            <a:off x="640080" y="1691639"/>
+            <a:ext cx="10911535" cy="4617720"/>
+          </a:xfrm>
+          <a:prstGeom prst="rect">
+            <a:avLst/>
+          </a:prstGeom>
+          <a:noFill/>
+        </p:spPr>
+        <p:txBody>
+          <a:bodyPr wrap="square" anchor="t" lIns="0" rIns="0" tIns="0" bIns="0">
+            <a:spAutoFit/>
+          </a:bodyPr>
+          <a:lstStyle/>
+          <a:p>
+            <a:pPr>
+              <a:spcAft>
+                <a:spcPts val="1000"/>
+              </a:spcAft>
+            </a:pPr>
+            <a:r>
+              <a:rPr sz="1600" b="0" i="0">
+                <a:solidFill>
+                  <a:srgbClr val="2B2B2B"/>
+                </a:solidFill>
+                <a:latin typeface="Calibri"/>
+              </a:rPr>
+              <a:t>–   Hasta hoy trabajamos el </a:t>
+            </a:r>
+            <a:r>
+              <a:rPr sz="1600" b="1" i="0">
+                <a:solidFill>
+                  <a:srgbClr val="2B2B2B"/>
+                </a:solidFill>
+                <a:latin typeface="Calibri"/>
+              </a:rPr>
+              <a:t>qué</a:t>
+            </a:r>
+            <a:r>
+              <a:rPr sz="1600" b="0" i="0">
+                <a:solidFill>
+                  <a:srgbClr val="2B2B2B"/>
+                </a:solidFill>
+                <a:latin typeface="Calibri"/>
+              </a:rPr>
+              <a:t>: problema, pregunta, objetivos, marco. Desde hoy trabajamos el </a:t>
+            </a:r>
+            <a:r>
+              <a:rPr sz="1600" b="1" i="0">
+                <a:solidFill>
+                  <a:srgbClr val="2B2B2B"/>
+                </a:solidFill>
+                <a:latin typeface="Calibri"/>
+              </a:rPr>
+              <a:t>cómo</a:t>
+            </a:r>
+            <a:r>
+              <a:rPr sz="1600" b="0" i="0">
+                <a:solidFill>
+                  <a:srgbClr val="2B2B2B"/>
+                </a:solidFill>
+                <a:latin typeface="Calibri"/>
+              </a:rPr>
+              <a:t>.</a:t>
+            </a:r>
+          </a:p>
+          <a:p>
+            <a:pPr>
+              <a:spcAft>
+                <a:spcPts val="1000"/>
+              </a:spcAft>
+            </a:pPr>
+            <a:r>
+              <a:rPr sz="1600" b="0" i="0">
+                <a:solidFill>
+                  <a:srgbClr val="2B2B2B"/>
+                </a:solidFill>
+                <a:latin typeface="Calibri"/>
+              </a:rPr>
+              <a:t>–   Lea estas dos preguntas y note que suenan parecidas, pero exigen métodos opuestos:</a:t>
+            </a:r>
+          </a:p>
+          <a:p>
+            <a:pPr lvl="1">
+              <a:spcAft>
+                <a:spcPts val="600"/>
+              </a:spcAft>
+            </a:pPr>
+            <a:r>
+              <a:rPr sz="1500" b="0" i="0">
+                <a:solidFill>
+                  <a:srgbClr val="2B2B2B"/>
+                </a:solidFill>
+                <a:latin typeface="Calibri"/>
+              </a:rPr>
+              <a:t>●   </a:t>
+            </a:r>
+            <a:r>
+              <a:rPr sz="1500" b="1" i="0">
+                <a:solidFill>
+                  <a:srgbClr val="2B2B2B"/>
+                </a:solidFill>
+                <a:latin typeface="Calibri"/>
+              </a:rPr>
+              <a:t>A.</a:t>
+            </a:r>
+            <a:r>
+              <a:rPr sz="1500" b="0" i="0">
+                <a:solidFill>
+                  <a:srgbClr val="2B2B2B"/>
+                </a:solidFill>
+                <a:latin typeface="Calibri"/>
+              </a:rPr>
+              <a:t> "¿</a:t>
+            </a:r>
+            <a:r>
+              <a:rPr sz="1500" b="1" i="0">
+                <a:solidFill>
+                  <a:srgbClr val="2B2B2B"/>
+                </a:solidFill>
+                <a:latin typeface="Calibri"/>
+              </a:rPr>
+              <a:t>En qué medida</a:t>
+            </a:r>
+            <a:r>
+              <a:rPr sz="1500" b="0" i="0">
+                <a:solidFill>
+                  <a:srgbClr val="2B2B2B"/>
+                </a:solidFill>
+                <a:latin typeface="Calibri"/>
+              </a:rPr>
+              <a:t> un clasificador automático reduce el tiempo de respuesta a las PQRS de una alcaldía?"</a:t>
+            </a:r>
+          </a:p>
+          <a:p>
+            <a:pPr lvl="1">
+              <a:spcAft>
+                <a:spcPts val="600"/>
+              </a:spcAft>
+            </a:pPr>
+            <a:r>
+              <a:rPr sz="1500" b="0" i="0">
+                <a:solidFill>
+                  <a:srgbClr val="2B2B2B"/>
+                </a:solidFill>
+                <a:latin typeface="Calibri"/>
+              </a:rPr>
+              <a:t>●   </a:t>
+            </a:r>
+            <a:r>
+              <a:rPr sz="1500" b="1" i="0">
+                <a:solidFill>
+                  <a:srgbClr val="2B2B2B"/>
+                </a:solidFill>
+                <a:latin typeface="Calibri"/>
+              </a:rPr>
+              <a:t>B.</a:t>
+            </a:r>
+            <a:r>
+              <a:rPr sz="1500" b="0" i="0">
+                <a:solidFill>
+                  <a:srgbClr val="2B2B2B"/>
+                </a:solidFill>
+                <a:latin typeface="Calibri"/>
+              </a:rPr>
+              <a:t> "¿</a:t>
+            </a:r>
+            <a:r>
+              <a:rPr sz="1500" b="1" i="0">
+                <a:solidFill>
+                  <a:srgbClr val="2B2B2B"/>
+                </a:solidFill>
+                <a:latin typeface="Calibri"/>
+              </a:rPr>
+              <a:t>Cómo experimentan</a:t>
+            </a:r>
+            <a:r>
+              <a:rPr sz="1500" b="0" i="0">
+                <a:solidFill>
+                  <a:srgbClr val="2B2B2B"/>
+                </a:solidFill>
+                <a:latin typeface="Calibri"/>
+              </a:rPr>
+              <a:t> los analistas de una IPS la incorporación de un asistente de IA en su rutina diaria?"</a:t>
+            </a:r>
+          </a:p>
+          <a:p>
+            <a:pPr>
+              <a:spcAft>
+                <a:spcPts val="1000"/>
+              </a:spcAft>
+            </a:pPr>
+            <a:r>
+              <a:rPr sz="1600" b="0" i="0">
+                <a:solidFill>
+                  <a:srgbClr val="2B2B2B"/>
+                </a:solidFill>
+                <a:latin typeface="Calibri"/>
+              </a:rPr>
+              <a:t>–   La </a:t>
+            </a:r>
+            <a:r>
+              <a:rPr sz="1600" b="1" i="0">
+                <a:solidFill>
+                  <a:srgbClr val="2B2B2B"/>
+                </a:solidFill>
+                <a:latin typeface="Calibri"/>
+              </a:rPr>
+              <a:t>A</a:t>
+            </a:r>
+            <a:r>
+              <a:rPr sz="1600" b="0" i="0">
+                <a:solidFill>
+                  <a:srgbClr val="2B2B2B"/>
+                </a:solidFill>
+                <a:latin typeface="Calibri"/>
+              </a:rPr>
+              <a:t> pide números, comparación y medición → ruta </a:t>
+            </a:r>
+            <a:r>
+              <a:rPr sz="1600" b="1" i="0">
+                <a:solidFill>
+                  <a:srgbClr val="2B2B2B"/>
+                </a:solidFill>
+                <a:latin typeface="Calibri"/>
+              </a:rPr>
+              <a:t>cuantitativa</a:t>
+            </a:r>
+            <a:r>
+              <a:rPr sz="1600" b="0" i="0">
+                <a:solidFill>
+                  <a:srgbClr val="2B2B2B"/>
+                </a:solidFill>
+                <a:latin typeface="Calibri"/>
+              </a:rPr>
+              <a:t>.</a:t>
+            </a:r>
+          </a:p>
+          <a:p>
+            <a:pPr>
+              <a:spcAft>
+                <a:spcPts val="1000"/>
+              </a:spcAft>
+            </a:pPr>
+            <a:r>
+              <a:rPr sz="1600" b="0" i="0">
+                <a:solidFill>
+                  <a:srgbClr val="2B2B2B"/>
+                </a:solidFill>
+                <a:latin typeface="Calibri"/>
+              </a:rPr>
+              <a:t>–   La </a:t>
+            </a:r>
+            <a:r>
+              <a:rPr sz="1600" b="1" i="0">
+                <a:solidFill>
+                  <a:srgbClr val="2B2B2B"/>
+                </a:solidFill>
+                <a:latin typeface="Calibri"/>
+              </a:rPr>
+              <a:t>B</a:t>
+            </a:r>
+            <a:r>
+              <a:rPr sz="1600" b="0" i="0">
+                <a:solidFill>
+                  <a:srgbClr val="2B2B2B"/>
+                </a:solidFill>
+                <a:latin typeface="Calibri"/>
+              </a:rPr>
+              <a:t> pide relatos, significados y experiencia vivida → ruta </a:t>
+            </a:r>
+            <a:r>
+              <a:rPr sz="1600" b="1" i="0">
+                <a:solidFill>
+                  <a:srgbClr val="2B2B2B"/>
+                </a:solidFill>
+                <a:latin typeface="Calibri"/>
+              </a:rPr>
+              <a:t>cualitativa</a:t>
+            </a:r>
+            <a:r>
+              <a:rPr sz="1600" b="0" i="0">
+                <a:solidFill>
+                  <a:srgbClr val="2B2B2B"/>
+                </a:solidFill>
+                <a:latin typeface="Calibri"/>
+              </a:rPr>
+              <a:t>.</a:t>
+            </a:r>
+          </a:p>
+          <a:p>
+            <a:pPr>
+              <a:spcAft>
+                <a:spcPts val="1000"/>
+              </a:spcAft>
+            </a:pPr>
+            <a:r>
+              <a:rPr sz="1600" b="0" i="0">
+                <a:solidFill>
+                  <a:srgbClr val="2B2B2B"/>
+                </a:solidFill>
+                <a:latin typeface="Calibri"/>
+              </a:rPr>
+              <a:t>–   Si usted responde la B con una encuesta de escalas cerradas, no está investigando: está </a:t>
+            </a:r>
+            <a:r>
+              <a:rPr sz="1600" b="1" i="0">
+                <a:solidFill>
+                  <a:srgbClr val="2B2B2B"/>
+                </a:solidFill>
+                <a:latin typeface="Calibri"/>
+              </a:rPr>
+              <a:t>forzando</a:t>
+            </a:r>
+            <a:r>
+              <a:rPr sz="1600" b="0" i="0">
+                <a:solidFill>
+                  <a:srgbClr val="2B2B2B"/>
+                </a:solidFill>
+                <a:latin typeface="Calibri"/>
+              </a:rPr>
+              <a:t> el dato.</a:t>
+            </a:r>
+          </a:p>
+          <a:p>
+            <a:pPr>
+              <a:spcAft>
+                <a:spcPts val="1000"/>
+              </a:spcAft>
+            </a:pPr>
+            <a:r>
+              <a:rPr sz="1600" b="0" i="0">
+                <a:solidFill>
+                  <a:srgbClr val="2B2B2B"/>
+                </a:solidFill>
+                <a:latin typeface="Calibri"/>
+              </a:rPr>
+              <a:t>–   Ese desajuste </a:t>
+            </a:r>
+            <a:r>
+              <a:rPr sz="1600" b="1" i="0">
+                <a:solidFill>
+                  <a:srgbClr val="2B2B2B"/>
+                </a:solidFill>
+                <a:latin typeface="Calibri"/>
+              </a:rPr>
+              <a:t>pregunta–método</a:t>
+            </a:r>
+            <a:r>
+              <a:rPr sz="1600" b="0" i="0">
+                <a:solidFill>
+                  <a:srgbClr val="2B2B2B"/>
+                </a:solidFill>
+                <a:latin typeface="Calibri"/>
+              </a:rPr>
+              <a:t> es el error más caro del anteproyecto, porque obliga a rehacerlo entero.</a:t>
+            </a:r>
+          </a:p>
+          <a:p>
+            <a:pPr>
+              <a:spcAft>
+                <a:spcPts val="1000"/>
+              </a:spcAft>
+            </a:pPr>
+            <a:r>
+              <a:rPr sz="1600" b="0" i="0">
+                <a:solidFill>
+                  <a:srgbClr val="2B2B2B"/>
+                </a:solidFill>
+                <a:latin typeface="Calibri"/>
+              </a:rPr>
+              <a:t>–   Aviso permanente: hoy </a:t>
+            </a:r>
+            <a:r>
+              <a:rPr sz="1600" b="1" i="0">
+                <a:solidFill>
+                  <a:srgbClr val="2B2B2B"/>
+                </a:solidFill>
+                <a:latin typeface="Calibri"/>
+              </a:rPr>
+              <a:t>proponemos</a:t>
+            </a:r>
+            <a:r>
+              <a:rPr sz="1600" b="0" i="0">
+                <a:solidFill>
+                  <a:srgbClr val="2B2B2B"/>
+                </a:solidFill>
+                <a:latin typeface="Calibri"/>
+              </a:rPr>
+              <a:t> el diseño. Aplicarlo es trabajo de </a:t>
+            </a:r>
+            <a:r>
+              <a:rPr sz="1600" b="1" i="0">
+                <a:solidFill>
+                  <a:srgbClr val="2B2B2B"/>
+                </a:solidFill>
+                <a:latin typeface="Calibri"/>
+              </a:rPr>
+              <a:t>Proyecto II</a:t>
+            </a:r>
+            <a:r>
+              <a:rPr sz="1600" b="0" i="0">
+                <a:solidFill>
+                  <a:srgbClr val="2B2B2B"/>
+                </a:solidFill>
+                <a:latin typeface="Calibri"/>
+              </a:rPr>
+              <a:t>, con aval.</a:t>
+            </a:r>
+          </a:p>
+        </p:txBody>
+      </p:sp>
+      <p:sp>
+        <p:nvSpPr>
+          <p:cNvPr id="5" name="TextBox 4"/>
+          <p:cNvSpPr txBox="1"/>
+          <p:nvPr/>
+        </p:nvSpPr>
+        <p:spPr>
+          <a:xfrm>
+            <a:off x="11094415" y="6446520"/>
+            <a:ext cx="548640" cy="274320"/>
+          </a:xfrm>
+          <a:prstGeom prst="rect">
+            <a:avLst/>
+          </a:prstGeom>
+          <a:noFill/>
+        </p:spPr>
+        <p:txBody>
+          <a:bodyPr wrap="square" anchor="t" lIns="0" rIns="0" tIns="0" bIns="0">
+            <a:spAutoFit/>
+          </a:bodyPr>
+          <a:lstStyle/>
+          <a:p>
+            <a:pPr algn="r"/>
+            <a:r>
+              <a:rPr sz="1000" b="1" i="0">
+                <a:solidFill>
+                  <a:srgbClr val="8F989D"/>
+                </a:solidFill>
+                <a:latin typeface="Calibri"/>
+              </a:rPr>
+              <a:t>2</a:t>
+            </a:r>
+          </a:p>
+        </p:txBody>
+      </p:sp>
+    </p:spTree>
+  </p:cSld>
+  <p:clrMapOvr>
+    <a:masterClrMapping/>
+  </p:clrMapOvr>
+</p:sld>
+</file>
+
+<file path=ppt/slides/slide20.xml><?xml version="1.0" encoding="utf-8"?>
 <p:sld xmlns:a="http://schemas.openxmlformats.org/drawingml/2006/main" xmlns:p="http://schemas.openxmlformats.org/presentationml/2006/main" xmlns:r="http://schemas.openxmlformats.org/officeDocument/2006/relationships">
   <p:cSld>
     <p:bg>
@@ -7889,565 +9888,6 @@
                 <a:latin typeface="Calibri"/>
               </a:rPr>
               <a:t>PROYECTO I</a:t>
-            </a:r>
-          </a:p>
-        </p:txBody>
-      </p:sp>
-    </p:spTree>
-  </p:cSld>
-  <p:clrMapOvr>
-    <a:masterClrMapping/>
-  </p:clrMapOvr>
-</p:sld>
-</file>
-
-<file path=ppt/slides/slide2.xml><?xml version="1.0" encoding="utf-8"?>
-<p:sld xmlns:a="http://schemas.openxmlformats.org/drawingml/2006/main" xmlns:p="http://schemas.openxmlformats.org/presentationml/2006/main" xmlns:r="http://schemas.openxmlformats.org/officeDocument/2006/relationships">
-  <p:cSld>
-    <p:bg>
-      <p:bgPr>
-        <a:solidFill>
-          <a:srgbClr val="FFFFFF"/>
-        </a:solidFill>
-        <a:effectLst/>
-      </p:bgPr>
-    </p:bg>
-    <p:spTree>
-      <p:nvGrpSpPr>
-        <p:cNvPr id="1" name=""/>
-        <p:cNvGrpSpPr/>
-        <p:nvPr/>
-      </p:nvGrpSpPr>
-      <p:grpSpPr/>
-      <p:sp>
-        <p:nvSpPr>
-          <p:cNvPr id="2" name="Rectangle 1"/>
-          <p:cNvSpPr/>
-          <p:nvPr/>
-        </p:nvSpPr>
-        <p:spPr>
-          <a:xfrm>
-            <a:off x="0" y="0"/>
-            <a:ext cx="12191695" cy="1188720"/>
-          </a:xfrm>
-          <a:prstGeom prst="rect">
-            <a:avLst/>
-          </a:prstGeom>
-          <a:solidFill>
-            <a:srgbClr val="0C2340"/>
-          </a:solidFill>
-          <a:ln>
-            <a:noFill/>
-          </a:ln>
-          <a:effectLst/>
-        </p:spPr>
-        <p:style>
-          <a:lnRef idx="1">
-            <a:schemeClr val="accent1"/>
-          </a:lnRef>
-          <a:fillRef idx="3">
-            <a:schemeClr val="accent1"/>
-          </a:fillRef>
-          <a:effectRef idx="2">
-            <a:schemeClr val="accent1"/>
-          </a:effectRef>
-          <a:fontRef idx="minor">
-            <a:schemeClr val="lt1"/>
-          </a:fontRef>
-        </p:style>
-        <p:txBody>
-          <a:bodyPr rtlCol="0" anchor="ctr"/>
-          <a:lstStyle/>
-          <a:p>
-            <a:pPr algn="ctr"/>
-          </a:p>
-        </p:txBody>
-      </p:sp>
-      <p:sp>
-        <p:nvSpPr>
-          <p:cNvPr id="3" name="TextBox 2"/>
-          <p:cNvSpPr txBox="1"/>
-          <p:nvPr/>
-        </p:nvSpPr>
-        <p:spPr>
-          <a:xfrm>
-            <a:off x="640080" y="0"/>
-            <a:ext cx="9082735" cy="1188720"/>
-          </a:xfrm>
-          <a:prstGeom prst="rect">
-            <a:avLst/>
-          </a:prstGeom>
-          <a:noFill/>
-        </p:spPr>
-        <p:txBody>
-          <a:bodyPr wrap="square" anchor="ctr" lIns="0" rIns="0" tIns="0" bIns="0">
-            <a:spAutoFit/>
-          </a:bodyPr>
-          <a:lstStyle/>
-          <a:p>
-            <a:pPr algn="ctr"/>
-            <a:r>
-              <a:rPr sz="2600" b="1" i="0">
-                <a:solidFill>
-                  <a:srgbClr val="FFFFFF"/>
-                </a:solidFill>
-                <a:latin typeface="Calibri"/>
-              </a:rPr>
-              <a:t>Dos preguntas de IA que NO se pueden investigar igual</a:t>
-            </a:r>
-          </a:p>
-        </p:txBody>
-      </p:sp>
-      <p:sp>
-        <p:nvSpPr>
-          <p:cNvPr id="4" name="TextBox 3"/>
-          <p:cNvSpPr txBox="1"/>
-          <p:nvPr/>
-        </p:nvSpPr>
-        <p:spPr>
-          <a:xfrm>
-            <a:off x="640080" y="1691639"/>
-            <a:ext cx="10911535" cy="4617720"/>
-          </a:xfrm>
-          <a:prstGeom prst="rect">
-            <a:avLst/>
-          </a:prstGeom>
-          <a:noFill/>
-        </p:spPr>
-        <p:txBody>
-          <a:bodyPr wrap="square" anchor="t" lIns="0" rIns="0" tIns="0" bIns="0">
-            <a:spAutoFit/>
-          </a:bodyPr>
-          <a:lstStyle/>
-          <a:p>
-            <a:pPr>
-              <a:spcAft>
-                <a:spcPts val="1000"/>
-              </a:spcAft>
-            </a:pPr>
-            <a:r>
-              <a:rPr sz="1600" b="0" i="0">
-                <a:solidFill>
-                  <a:srgbClr val="2B2B2B"/>
-                </a:solidFill>
-                <a:latin typeface="Calibri"/>
-              </a:rPr>
-              <a:t>–   Hasta hoy trabajamos el </a:t>
-            </a:r>
-            <a:r>
-              <a:rPr sz="1600" b="1" i="0">
-                <a:solidFill>
-                  <a:srgbClr val="2B2B2B"/>
-                </a:solidFill>
-                <a:latin typeface="Calibri"/>
-              </a:rPr>
-              <a:t>qué</a:t>
-            </a:r>
-            <a:r>
-              <a:rPr sz="1600" b="0" i="0">
-                <a:solidFill>
-                  <a:srgbClr val="2B2B2B"/>
-                </a:solidFill>
-                <a:latin typeface="Calibri"/>
-              </a:rPr>
-              <a:t>: problema, pregunta, objetivos, marco. Desde hoy trabajamos el </a:t>
-            </a:r>
-            <a:r>
-              <a:rPr sz="1600" b="1" i="0">
-                <a:solidFill>
-                  <a:srgbClr val="2B2B2B"/>
-                </a:solidFill>
-                <a:latin typeface="Calibri"/>
-              </a:rPr>
-              <a:t>cómo</a:t>
-            </a:r>
-            <a:r>
-              <a:rPr sz="1600" b="0" i="0">
-                <a:solidFill>
-                  <a:srgbClr val="2B2B2B"/>
-                </a:solidFill>
-                <a:latin typeface="Calibri"/>
-              </a:rPr>
-              <a:t>.</a:t>
-            </a:r>
-          </a:p>
-          <a:p>
-            <a:pPr>
-              <a:spcAft>
-                <a:spcPts val="1000"/>
-              </a:spcAft>
-            </a:pPr>
-            <a:r>
-              <a:rPr sz="1600" b="0" i="0">
-                <a:solidFill>
-                  <a:srgbClr val="2B2B2B"/>
-                </a:solidFill>
-                <a:latin typeface="Calibri"/>
-              </a:rPr>
-              <a:t>–   Lea estas dos preguntas y note que suenan parecidas, pero exigen métodos opuestos:</a:t>
-            </a:r>
-          </a:p>
-          <a:p>
-            <a:pPr lvl="1">
-              <a:spcAft>
-                <a:spcPts val="600"/>
-              </a:spcAft>
-            </a:pPr>
-            <a:r>
-              <a:rPr sz="1500" b="0" i="0">
-                <a:solidFill>
-                  <a:srgbClr val="2B2B2B"/>
-                </a:solidFill>
-                <a:latin typeface="Calibri"/>
-              </a:rPr>
-              <a:t>●   </a:t>
-            </a:r>
-            <a:r>
-              <a:rPr sz="1500" b="1" i="0">
-                <a:solidFill>
-                  <a:srgbClr val="2B2B2B"/>
-                </a:solidFill>
-                <a:latin typeface="Calibri"/>
-              </a:rPr>
-              <a:t>A.</a:t>
-            </a:r>
-            <a:r>
-              <a:rPr sz="1500" b="0" i="0">
-                <a:solidFill>
-                  <a:srgbClr val="2B2B2B"/>
-                </a:solidFill>
-                <a:latin typeface="Calibri"/>
-              </a:rPr>
-              <a:t> "¿</a:t>
-            </a:r>
-            <a:r>
-              <a:rPr sz="1500" b="1" i="0">
-                <a:solidFill>
-                  <a:srgbClr val="2B2B2B"/>
-                </a:solidFill>
-                <a:latin typeface="Calibri"/>
-              </a:rPr>
-              <a:t>En qué medida</a:t>
-            </a:r>
-            <a:r>
-              <a:rPr sz="1500" b="0" i="0">
-                <a:solidFill>
-                  <a:srgbClr val="2B2B2B"/>
-                </a:solidFill>
-                <a:latin typeface="Calibri"/>
-              </a:rPr>
-              <a:t> un clasificador automático reduce el tiempo de respuesta a las PQRS de una alcaldía?"</a:t>
-            </a:r>
-          </a:p>
-          <a:p>
-            <a:pPr lvl="1">
-              <a:spcAft>
-                <a:spcPts val="600"/>
-              </a:spcAft>
-            </a:pPr>
-            <a:r>
-              <a:rPr sz="1500" b="0" i="0">
-                <a:solidFill>
-                  <a:srgbClr val="2B2B2B"/>
-                </a:solidFill>
-                <a:latin typeface="Calibri"/>
-              </a:rPr>
-              <a:t>●   </a:t>
-            </a:r>
-            <a:r>
-              <a:rPr sz="1500" b="1" i="0">
-                <a:solidFill>
-                  <a:srgbClr val="2B2B2B"/>
-                </a:solidFill>
-                <a:latin typeface="Calibri"/>
-              </a:rPr>
-              <a:t>B.</a:t>
-            </a:r>
-            <a:r>
-              <a:rPr sz="1500" b="0" i="0">
-                <a:solidFill>
-                  <a:srgbClr val="2B2B2B"/>
-                </a:solidFill>
-                <a:latin typeface="Calibri"/>
-              </a:rPr>
-              <a:t> "¿</a:t>
-            </a:r>
-            <a:r>
-              <a:rPr sz="1500" b="1" i="0">
-                <a:solidFill>
-                  <a:srgbClr val="2B2B2B"/>
-                </a:solidFill>
-                <a:latin typeface="Calibri"/>
-              </a:rPr>
-              <a:t>Cómo experimentan</a:t>
-            </a:r>
-            <a:r>
-              <a:rPr sz="1500" b="0" i="0">
-                <a:solidFill>
-                  <a:srgbClr val="2B2B2B"/>
-                </a:solidFill>
-                <a:latin typeface="Calibri"/>
-              </a:rPr>
-              <a:t> los analistas de una IPS la incorporación de un asistente de IA en su rutina diaria?"</a:t>
-            </a:r>
-          </a:p>
-          <a:p>
-            <a:pPr>
-              <a:spcAft>
-                <a:spcPts val="1000"/>
-              </a:spcAft>
-            </a:pPr>
-            <a:r>
-              <a:rPr sz="1600" b="0" i="0">
-                <a:solidFill>
-                  <a:srgbClr val="2B2B2B"/>
-                </a:solidFill>
-                <a:latin typeface="Calibri"/>
-              </a:rPr>
-              <a:t>–   La </a:t>
-            </a:r>
-            <a:r>
-              <a:rPr sz="1600" b="1" i="0">
-                <a:solidFill>
-                  <a:srgbClr val="2B2B2B"/>
-                </a:solidFill>
-                <a:latin typeface="Calibri"/>
-              </a:rPr>
-              <a:t>A</a:t>
-            </a:r>
-            <a:r>
-              <a:rPr sz="1600" b="0" i="0">
-                <a:solidFill>
-                  <a:srgbClr val="2B2B2B"/>
-                </a:solidFill>
-                <a:latin typeface="Calibri"/>
-              </a:rPr>
-              <a:t> pide números, comparación y medición → ruta </a:t>
-            </a:r>
-            <a:r>
-              <a:rPr sz="1600" b="1" i="0">
-                <a:solidFill>
-                  <a:srgbClr val="2B2B2B"/>
-                </a:solidFill>
-                <a:latin typeface="Calibri"/>
-              </a:rPr>
-              <a:t>cuantitativa</a:t>
-            </a:r>
-            <a:r>
-              <a:rPr sz="1600" b="0" i="0">
-                <a:solidFill>
-                  <a:srgbClr val="2B2B2B"/>
-                </a:solidFill>
-                <a:latin typeface="Calibri"/>
-              </a:rPr>
-              <a:t>.</a:t>
-            </a:r>
-          </a:p>
-          <a:p>
-            <a:pPr>
-              <a:spcAft>
-                <a:spcPts val="1000"/>
-              </a:spcAft>
-            </a:pPr>
-            <a:r>
-              <a:rPr sz="1600" b="0" i="0">
-                <a:solidFill>
-                  <a:srgbClr val="2B2B2B"/>
-                </a:solidFill>
-                <a:latin typeface="Calibri"/>
-              </a:rPr>
-              <a:t>–   La </a:t>
-            </a:r>
-            <a:r>
-              <a:rPr sz="1600" b="1" i="0">
-                <a:solidFill>
-                  <a:srgbClr val="2B2B2B"/>
-                </a:solidFill>
-                <a:latin typeface="Calibri"/>
-              </a:rPr>
-              <a:t>B</a:t>
-            </a:r>
-            <a:r>
-              <a:rPr sz="1600" b="0" i="0">
-                <a:solidFill>
-                  <a:srgbClr val="2B2B2B"/>
-                </a:solidFill>
-                <a:latin typeface="Calibri"/>
-              </a:rPr>
-              <a:t> pide relatos, significados y experiencia vivida → ruta </a:t>
-            </a:r>
-            <a:r>
-              <a:rPr sz="1600" b="1" i="0">
-                <a:solidFill>
-                  <a:srgbClr val="2B2B2B"/>
-                </a:solidFill>
-                <a:latin typeface="Calibri"/>
-              </a:rPr>
-              <a:t>cualitativa</a:t>
-            </a:r>
-            <a:r>
-              <a:rPr sz="1600" b="0" i="0">
-                <a:solidFill>
-                  <a:srgbClr val="2B2B2B"/>
-                </a:solidFill>
-                <a:latin typeface="Calibri"/>
-              </a:rPr>
-              <a:t>.</a:t>
-            </a:r>
-          </a:p>
-          <a:p>
-            <a:pPr>
-              <a:spcAft>
-                <a:spcPts val="1000"/>
-              </a:spcAft>
-            </a:pPr>
-            <a:r>
-              <a:rPr sz="1600" b="0" i="0">
-                <a:solidFill>
-                  <a:srgbClr val="2B2B2B"/>
-                </a:solidFill>
-                <a:latin typeface="Calibri"/>
-              </a:rPr>
-              <a:t>–   Si usted responde la B con una encuesta de escalas cerradas, no está investigando: está </a:t>
-            </a:r>
-            <a:r>
-              <a:rPr sz="1600" b="1" i="0">
-                <a:solidFill>
-                  <a:srgbClr val="2B2B2B"/>
-                </a:solidFill>
-                <a:latin typeface="Calibri"/>
-              </a:rPr>
-              <a:t>forzando</a:t>
-            </a:r>
-            <a:r>
-              <a:rPr sz="1600" b="0" i="0">
-                <a:solidFill>
-                  <a:srgbClr val="2B2B2B"/>
-                </a:solidFill>
-                <a:latin typeface="Calibri"/>
-              </a:rPr>
-              <a:t> el dato.</a:t>
-            </a:r>
-          </a:p>
-          <a:p>
-            <a:pPr>
-              <a:spcAft>
-                <a:spcPts val="1000"/>
-              </a:spcAft>
-            </a:pPr>
-            <a:r>
-              <a:rPr sz="1600" b="0" i="0">
-                <a:solidFill>
-                  <a:srgbClr val="2B2B2B"/>
-                </a:solidFill>
-                <a:latin typeface="Calibri"/>
-              </a:rPr>
-              <a:t>–   Ese desajuste </a:t>
-            </a:r>
-            <a:r>
-              <a:rPr sz="1600" b="1" i="0">
-                <a:solidFill>
-                  <a:srgbClr val="2B2B2B"/>
-                </a:solidFill>
-                <a:latin typeface="Calibri"/>
-              </a:rPr>
-              <a:t>pregunta–método</a:t>
-            </a:r>
-            <a:r>
-              <a:rPr sz="1600" b="0" i="0">
-                <a:solidFill>
-                  <a:srgbClr val="2B2B2B"/>
-                </a:solidFill>
-                <a:latin typeface="Calibri"/>
-              </a:rPr>
-              <a:t> es el error más caro del anteproyecto, porque obliga a rehacerlo entero.</a:t>
-            </a:r>
-          </a:p>
-          <a:p>
-            <a:pPr>
-              <a:spcAft>
-                <a:spcPts val="1000"/>
-              </a:spcAft>
-            </a:pPr>
-            <a:r>
-              <a:rPr sz="1600" b="0" i="0">
-                <a:solidFill>
-                  <a:srgbClr val="2B2B2B"/>
-                </a:solidFill>
-                <a:latin typeface="Calibri"/>
-              </a:rPr>
-              <a:t>–   Aviso permanente: hoy </a:t>
-            </a:r>
-            <a:r>
-              <a:rPr sz="1600" b="1" i="0">
-                <a:solidFill>
-                  <a:srgbClr val="2B2B2B"/>
-                </a:solidFill>
-                <a:latin typeface="Calibri"/>
-              </a:rPr>
-              <a:t>proponemos</a:t>
-            </a:r>
-            <a:r>
-              <a:rPr sz="1600" b="0" i="0">
-                <a:solidFill>
-                  <a:srgbClr val="2B2B2B"/>
-                </a:solidFill>
-                <a:latin typeface="Calibri"/>
-              </a:rPr>
-              <a:t> el diseño. Aplicarlo es trabajo de </a:t>
-            </a:r>
-            <a:r>
-              <a:rPr sz="1600" b="1" i="0">
-                <a:solidFill>
-                  <a:srgbClr val="2B2B2B"/>
-                </a:solidFill>
-                <a:latin typeface="Calibri"/>
-              </a:rPr>
-              <a:t>Proyecto II</a:t>
-            </a:r>
-            <a:r>
-              <a:rPr sz="1600" b="0" i="0">
-                <a:solidFill>
-                  <a:srgbClr val="2B2B2B"/>
-                </a:solidFill>
-                <a:latin typeface="Calibri"/>
-              </a:rPr>
-              <a:t>, con aval.</a:t>
-            </a:r>
-          </a:p>
-        </p:txBody>
-      </p:sp>
-      <p:sp>
-        <p:nvSpPr>
-          <p:cNvPr id="5" name="TextBox 4"/>
-          <p:cNvSpPr txBox="1"/>
-          <p:nvPr/>
-        </p:nvSpPr>
-        <p:spPr>
-          <a:xfrm>
-            <a:off x="11094415" y="6446520"/>
-            <a:ext cx="548640" cy="274320"/>
-          </a:xfrm>
-          <a:prstGeom prst="rect">
-            <a:avLst/>
-          </a:prstGeom>
-          <a:noFill/>
-        </p:spPr>
-        <p:txBody>
-          <a:bodyPr wrap="square" anchor="t" lIns="0" rIns="0" tIns="0" bIns="0">
-            <a:spAutoFit/>
-          </a:bodyPr>
-          <a:lstStyle/>
-          <a:p>
-            <a:pPr algn="r"/>
-            <a:r>
-              <a:rPr sz="1000" b="1" i="0">
-                <a:solidFill>
-                  <a:srgbClr val="8F989D"/>
-                </a:solidFill>
-                <a:latin typeface="Calibri"/>
-              </a:rPr>
-              <a:t>2</a:t>
             </a:r>
           </a:p>
         </p:txBody>
